--- a/docs/pptx/entire/ritu-entire-linsubhr-ratio-throm3.pptx
+++ b/docs/pptx/entire/ritu-entire-linsubhr-ratio-throm3.pptx
@@ -2960,548 +2960,548 @@
           <p:spPr>
             <a:xfrm>
               <a:off x="1172049" y="2073503"/>
-              <a:ext cx="7090630" cy="3432521"/>
+              <a:ext cx="7090630" cy="3432949"/>
             </a:xfrm>
             <a:custGeom>
               <a:avLst/>
               <a:pathLst>
-                <a:path w="7090630" h="3432521">
+                <a:path w="7090630" h="3432949">
                   <a:moveTo>
-                    <a:pt x="1522718" y="0"/>
+                    <a:pt x="1528469" y="0"/>
                   </a:moveTo>
                   <a:lnTo>
-                    <a:pt x="1575695" y="138029"/>
-                  </a:lnTo>
-                  <a:lnTo>
-                    <a:pt x="1647318" y="314779"/>
-                  </a:lnTo>
-                  <a:lnTo>
-                    <a:pt x="1718940" y="482192"/>
-                  </a:lnTo>
-                  <a:lnTo>
-                    <a:pt x="1790563" y="640760"/>
-                  </a:lnTo>
-                  <a:lnTo>
-                    <a:pt x="1862185" y="790952"/>
-                  </a:lnTo>
-                  <a:lnTo>
-                    <a:pt x="1933808" y="933209"/>
-                  </a:lnTo>
-                  <a:lnTo>
-                    <a:pt x="2005430" y="1067951"/>
-                  </a:lnTo>
-                  <a:lnTo>
-                    <a:pt x="2077053" y="1195575"/>
-                  </a:lnTo>
-                  <a:lnTo>
-                    <a:pt x="2148675" y="1316456"/>
-                  </a:lnTo>
-                  <a:lnTo>
-                    <a:pt x="2220298" y="1430951"/>
-                  </a:lnTo>
-                  <a:lnTo>
-                    <a:pt x="2291920" y="1539398"/>
-                  </a:lnTo>
-                  <a:lnTo>
-                    <a:pt x="2363543" y="1642116"/>
-                  </a:lnTo>
-                  <a:lnTo>
-                    <a:pt x="2435165" y="1739407"/>
-                  </a:lnTo>
-                  <a:lnTo>
-                    <a:pt x="2506788" y="1831558"/>
-                  </a:lnTo>
-                  <a:lnTo>
-                    <a:pt x="2578410" y="1918841"/>
-                  </a:lnTo>
-                  <a:lnTo>
-                    <a:pt x="2650033" y="2001514"/>
-                  </a:lnTo>
-                  <a:lnTo>
-                    <a:pt x="2721655" y="2079818"/>
-                  </a:lnTo>
-                  <a:lnTo>
-                    <a:pt x="2793278" y="2153986"/>
-                  </a:lnTo>
-                  <a:lnTo>
-                    <a:pt x="2864901" y="2224236"/>
-                  </a:lnTo>
-                  <a:lnTo>
-                    <a:pt x="2936523" y="2290774"/>
-                  </a:lnTo>
-                  <a:lnTo>
-                    <a:pt x="3008146" y="2353797"/>
-                  </a:lnTo>
-                  <a:lnTo>
-                    <a:pt x="3079768" y="2413491"/>
-                  </a:lnTo>
-                  <a:lnTo>
-                    <a:pt x="3151391" y="2470032"/>
-                  </a:lnTo>
-                  <a:lnTo>
-                    <a:pt x="3223013" y="2523585"/>
-                  </a:lnTo>
-                  <a:lnTo>
-                    <a:pt x="3294636" y="2574309"/>
-                  </a:lnTo>
-                  <a:lnTo>
-                    <a:pt x="3366258" y="2622354"/>
-                  </a:lnTo>
-                  <a:lnTo>
-                    <a:pt x="3437881" y="2659422"/>
-                  </a:lnTo>
-                  <a:lnTo>
-                    <a:pt x="3509503" y="2676100"/>
-                  </a:lnTo>
-                  <a:lnTo>
-                    <a:pt x="3581126" y="2692441"/>
-                  </a:lnTo>
-                  <a:lnTo>
-                    <a:pt x="3652748" y="2708451"/>
-                  </a:lnTo>
-                  <a:lnTo>
-                    <a:pt x="3724371" y="2724137"/>
-                  </a:lnTo>
-                  <a:lnTo>
-                    <a:pt x="3795993" y="2739506"/>
-                  </a:lnTo>
-                  <a:lnTo>
-                    <a:pt x="3867616" y="2754563"/>
-                  </a:lnTo>
-                  <a:lnTo>
-                    <a:pt x="3939238" y="2769317"/>
-                  </a:lnTo>
-                  <a:lnTo>
-                    <a:pt x="4010861" y="2783771"/>
-                  </a:lnTo>
-                  <a:lnTo>
-                    <a:pt x="4082483" y="2797933"/>
-                  </a:lnTo>
-                  <a:lnTo>
-                    <a:pt x="4154106" y="2811809"/>
-                  </a:lnTo>
-                  <a:lnTo>
-                    <a:pt x="4225729" y="2825404"/>
-                  </a:lnTo>
-                  <a:lnTo>
-                    <a:pt x="4297351" y="2838724"/>
-                  </a:lnTo>
-                  <a:lnTo>
-                    <a:pt x="4368974" y="2851774"/>
-                  </a:lnTo>
-                  <a:lnTo>
-                    <a:pt x="4440596" y="2864560"/>
-                  </a:lnTo>
-                  <a:lnTo>
-                    <a:pt x="4512219" y="2877088"/>
-                  </a:lnTo>
-                  <a:lnTo>
-                    <a:pt x="4583841" y="2889362"/>
-                  </a:lnTo>
-                  <a:lnTo>
-                    <a:pt x="4655464" y="2901388"/>
-                  </a:lnTo>
-                  <a:lnTo>
-                    <a:pt x="4727086" y="2913170"/>
-                  </a:lnTo>
-                  <a:lnTo>
-                    <a:pt x="4798709" y="2924715"/>
-                  </a:lnTo>
-                  <a:lnTo>
-                    <a:pt x="4870331" y="2936025"/>
-                  </a:lnTo>
-                  <a:lnTo>
-                    <a:pt x="4941954" y="2947107"/>
-                  </a:lnTo>
-                  <a:lnTo>
-                    <a:pt x="5013576" y="2957964"/>
-                  </a:lnTo>
-                  <a:lnTo>
-                    <a:pt x="5085199" y="2968602"/>
-                  </a:lnTo>
-                  <a:lnTo>
-                    <a:pt x="5156821" y="2979025"/>
-                  </a:lnTo>
-                  <a:lnTo>
-                    <a:pt x="5228444" y="2989236"/>
-                  </a:lnTo>
-                  <a:lnTo>
-                    <a:pt x="5300066" y="2999242"/>
-                  </a:lnTo>
-                  <a:lnTo>
-                    <a:pt x="5371689" y="3009044"/>
-                  </a:lnTo>
-                  <a:lnTo>
-                    <a:pt x="5443311" y="3018649"/>
-                  </a:lnTo>
-                  <a:lnTo>
-                    <a:pt x="5514934" y="3028059"/>
-                  </a:lnTo>
-                  <a:lnTo>
-                    <a:pt x="5586557" y="3037278"/>
-                  </a:lnTo>
-                  <a:lnTo>
-                    <a:pt x="5658179" y="3046311"/>
-                  </a:lnTo>
-                  <a:lnTo>
-                    <a:pt x="5729802" y="3055162"/>
-                  </a:lnTo>
-                  <a:lnTo>
-                    <a:pt x="5801424" y="3063833"/>
-                  </a:lnTo>
-                  <a:lnTo>
-                    <a:pt x="5873047" y="3072329"/>
-                  </a:lnTo>
-                  <a:lnTo>
-                    <a:pt x="5944669" y="3080653"/>
-                  </a:lnTo>
-                  <a:lnTo>
-                    <a:pt x="6016292" y="3088808"/>
-                  </a:lnTo>
-                  <a:lnTo>
-                    <a:pt x="6087914" y="3096799"/>
-                  </a:lnTo>
-                  <a:lnTo>
-                    <a:pt x="6159537" y="3104628"/>
-                  </a:lnTo>
-                  <a:lnTo>
-                    <a:pt x="6231159" y="3112298"/>
-                  </a:lnTo>
-                  <a:lnTo>
-                    <a:pt x="6302782" y="3119814"/>
-                  </a:lnTo>
-                  <a:lnTo>
-                    <a:pt x="6374404" y="3127177"/>
-                  </a:lnTo>
-                  <a:lnTo>
-                    <a:pt x="6446027" y="3134391"/>
-                  </a:lnTo>
-                  <a:lnTo>
-                    <a:pt x="6517649" y="3141459"/>
-                  </a:lnTo>
-                  <a:lnTo>
-                    <a:pt x="6589272" y="3148385"/>
-                  </a:lnTo>
-                  <a:lnTo>
-                    <a:pt x="6660894" y="3155170"/>
-                  </a:lnTo>
-                  <a:lnTo>
-                    <a:pt x="6732517" y="3161818"/>
-                  </a:lnTo>
-                  <a:lnTo>
-                    <a:pt x="6804139" y="3168331"/>
-                  </a:lnTo>
-                  <a:lnTo>
-                    <a:pt x="6875762" y="3174713"/>
-                  </a:lnTo>
-                  <a:lnTo>
-                    <a:pt x="6947385" y="3180965"/>
-                  </a:lnTo>
-                  <a:lnTo>
-                    <a:pt x="7019007" y="3187091"/>
-                  </a:lnTo>
-                  <a:lnTo>
-                    <a:pt x="7090630" y="3193093"/>
-                  </a:lnTo>
-                  <a:lnTo>
-                    <a:pt x="7090630" y="3432521"/>
-                  </a:lnTo>
-                  <a:lnTo>
-                    <a:pt x="7019007" y="3429664"/>
-                  </a:lnTo>
-                  <a:lnTo>
-                    <a:pt x="6947385" y="3426648"/>
-                  </a:lnTo>
-                  <a:lnTo>
-                    <a:pt x="6875762" y="3423463"/>
-                  </a:lnTo>
-                  <a:lnTo>
-                    <a:pt x="6804139" y="3420101"/>
-                  </a:lnTo>
-                  <a:lnTo>
-                    <a:pt x="6732517" y="3416551"/>
-                  </a:lnTo>
-                  <a:lnTo>
-                    <a:pt x="6660894" y="3412803"/>
-                  </a:lnTo>
-                  <a:lnTo>
-                    <a:pt x="6589272" y="3408846"/>
-                  </a:lnTo>
-                  <a:lnTo>
-                    <a:pt x="6517649" y="3404669"/>
-                  </a:lnTo>
-                  <a:lnTo>
-                    <a:pt x="6446027" y="3400258"/>
-                  </a:lnTo>
-                  <a:lnTo>
-                    <a:pt x="6374404" y="3395602"/>
-                  </a:lnTo>
-                  <a:lnTo>
-                    <a:pt x="6302782" y="3390685"/>
-                  </a:lnTo>
-                  <a:lnTo>
-                    <a:pt x="6231159" y="3385495"/>
-                  </a:lnTo>
-                  <a:lnTo>
-                    <a:pt x="6159537" y="3380015"/>
-                  </a:lnTo>
-                  <a:lnTo>
-                    <a:pt x="6087914" y="3374229"/>
-                  </a:lnTo>
-                  <a:lnTo>
-                    <a:pt x="6016292" y="3368121"/>
-                  </a:lnTo>
-                  <a:lnTo>
-                    <a:pt x="5944669" y="3361672"/>
-                  </a:lnTo>
-                  <a:lnTo>
-                    <a:pt x="5873047" y="3354863"/>
-                  </a:lnTo>
-                  <a:lnTo>
-                    <a:pt x="5801424" y="3347674"/>
-                  </a:lnTo>
-                  <a:lnTo>
-                    <a:pt x="5729802" y="3340085"/>
-                  </a:lnTo>
-                  <a:lnTo>
-                    <a:pt x="5658179" y="3332072"/>
-                  </a:lnTo>
-                  <a:lnTo>
-                    <a:pt x="5586557" y="3323612"/>
-                  </a:lnTo>
-                  <a:lnTo>
-                    <a:pt x="5514934" y="3314681"/>
-                  </a:lnTo>
-                  <a:lnTo>
-                    <a:pt x="5443311" y="3305251"/>
-                  </a:lnTo>
-                  <a:lnTo>
-                    <a:pt x="5371689" y="3295295"/>
-                  </a:lnTo>
-                  <a:lnTo>
-                    <a:pt x="5300066" y="3284784"/>
-                  </a:lnTo>
-                  <a:lnTo>
-                    <a:pt x="5228444" y="3273687"/>
-                  </a:lnTo>
-                  <a:lnTo>
-                    <a:pt x="5156821" y="3261971"/>
-                  </a:lnTo>
-                  <a:lnTo>
-                    <a:pt x="5085199" y="3249602"/>
-                  </a:lnTo>
-                  <a:lnTo>
-                    <a:pt x="5013576" y="3236542"/>
-                  </a:lnTo>
-                  <a:lnTo>
-                    <a:pt x="4941954" y="3222754"/>
-                  </a:lnTo>
-                  <a:lnTo>
-                    <a:pt x="4870331" y="3208197"/>
-                  </a:lnTo>
-                  <a:lnTo>
-                    <a:pt x="4798709" y="3192828"/>
-                  </a:lnTo>
-                  <a:lnTo>
-                    <a:pt x="4727086" y="3176602"/>
-                  </a:lnTo>
-                  <a:lnTo>
-                    <a:pt x="4655464" y="3159471"/>
-                  </a:lnTo>
-                  <a:lnTo>
-                    <a:pt x="4583841" y="3141385"/>
-                  </a:lnTo>
-                  <a:lnTo>
-                    <a:pt x="4512219" y="3122289"/>
-                  </a:lnTo>
-                  <a:lnTo>
-                    <a:pt x="4440596" y="3102129"/>
-                  </a:lnTo>
-                  <a:lnTo>
-                    <a:pt x="4368974" y="3080844"/>
-                  </a:lnTo>
-                  <a:lnTo>
-                    <a:pt x="4297351" y="3058372"/>
-                  </a:lnTo>
-                  <a:lnTo>
-                    <a:pt x="4225729" y="3034647"/>
-                  </a:lnTo>
-                  <a:lnTo>
-                    <a:pt x="4154106" y="3009598"/>
-                  </a:lnTo>
-                  <a:lnTo>
-                    <a:pt x="4082483" y="2983152"/>
-                  </a:lnTo>
-                  <a:lnTo>
-                    <a:pt x="4010861" y="2955231"/>
-                  </a:lnTo>
-                  <a:lnTo>
-                    <a:pt x="3939238" y="2925753"/>
-                  </a:lnTo>
-                  <a:lnTo>
-                    <a:pt x="3867616" y="2894631"/>
-                  </a:lnTo>
-                  <a:lnTo>
-                    <a:pt x="3795993" y="2861773"/>
-                  </a:lnTo>
-                  <a:lnTo>
-                    <a:pt x="3724371" y="2827082"/>
-                  </a:lnTo>
-                  <a:lnTo>
-                    <a:pt x="3652748" y="2790456"/>
-                  </a:lnTo>
-                  <a:lnTo>
-                    <a:pt x="3581126" y="2751788"/>
-                  </a:lnTo>
-                  <a:lnTo>
-                    <a:pt x="3509503" y="2710962"/>
-                  </a:lnTo>
-                  <a:lnTo>
-                    <a:pt x="3437881" y="2667860"/>
-                  </a:lnTo>
-                  <a:lnTo>
-                    <a:pt x="3366258" y="2642400"/>
-                  </a:lnTo>
-                  <a:lnTo>
-                    <a:pt x="3294636" y="2625026"/>
-                  </a:lnTo>
-                  <a:lnTo>
-                    <a:pt x="3223013" y="2607293"/>
-                  </a:lnTo>
-                  <a:lnTo>
-                    <a:pt x="3151391" y="2589194"/>
-                  </a:lnTo>
-                  <a:lnTo>
-                    <a:pt x="3079768" y="2570722"/>
-                  </a:lnTo>
-                  <a:lnTo>
-                    <a:pt x="3008146" y="2551867"/>
-                  </a:lnTo>
-                  <a:lnTo>
-                    <a:pt x="2936523" y="2532624"/>
-                  </a:lnTo>
-                  <a:lnTo>
-                    <a:pt x="2864901" y="2512983"/>
-                  </a:lnTo>
-                  <a:lnTo>
-                    <a:pt x="2793278" y="2492937"/>
-                  </a:lnTo>
-                  <a:lnTo>
-                    <a:pt x="2721655" y="2472476"/>
-                  </a:lnTo>
-                  <a:lnTo>
-                    <a:pt x="2650033" y="2451593"/>
-                  </a:lnTo>
-                  <a:lnTo>
-                    <a:pt x="2578410" y="2430279"/>
-                  </a:lnTo>
-                  <a:lnTo>
-                    <a:pt x="2506788" y="2408525"/>
-                  </a:lnTo>
-                  <a:lnTo>
-                    <a:pt x="2435165" y="2386321"/>
-                  </a:lnTo>
-                  <a:lnTo>
-                    <a:pt x="2363543" y="2363659"/>
-                  </a:lnTo>
-                  <a:lnTo>
-                    <a:pt x="2291920" y="2340529"/>
-                  </a:lnTo>
-                  <a:lnTo>
-                    <a:pt x="2220298" y="2316922"/>
-                  </a:lnTo>
-                  <a:lnTo>
-                    <a:pt x="2148675" y="2292826"/>
-                  </a:lnTo>
-                  <a:lnTo>
-                    <a:pt x="2077053" y="2268234"/>
-                  </a:lnTo>
-                  <a:lnTo>
-                    <a:pt x="2005430" y="2243133"/>
-                  </a:lnTo>
-                  <a:lnTo>
-                    <a:pt x="1933808" y="2217514"/>
-                  </a:lnTo>
-                  <a:lnTo>
-                    <a:pt x="1862185" y="2191366"/>
-                  </a:lnTo>
-                  <a:lnTo>
-                    <a:pt x="1790563" y="2164678"/>
-                  </a:lnTo>
-                  <a:lnTo>
-                    <a:pt x="1718940" y="2137439"/>
-                  </a:lnTo>
-                  <a:lnTo>
-                    <a:pt x="1647318" y="2109638"/>
-                  </a:lnTo>
-                  <a:lnTo>
-                    <a:pt x="1575695" y="2081262"/>
-                  </a:lnTo>
-                  <a:lnTo>
-                    <a:pt x="1504073" y="2052301"/>
-                  </a:lnTo>
-                  <a:lnTo>
-                    <a:pt x="1432450" y="2022741"/>
-                  </a:lnTo>
-                  <a:lnTo>
-                    <a:pt x="1360827" y="1992571"/>
-                  </a:lnTo>
-                  <a:lnTo>
-                    <a:pt x="1289205" y="1961778"/>
-                  </a:lnTo>
-                  <a:lnTo>
-                    <a:pt x="1217582" y="1930349"/>
-                  </a:lnTo>
-                  <a:lnTo>
-                    <a:pt x="1145960" y="1898271"/>
-                  </a:lnTo>
-                  <a:lnTo>
-                    <a:pt x="1074337" y="1865531"/>
-                  </a:lnTo>
-                  <a:lnTo>
-                    <a:pt x="1002715" y="1832114"/>
-                  </a:lnTo>
-                  <a:lnTo>
-                    <a:pt x="931092" y="1798008"/>
-                  </a:lnTo>
-                  <a:lnTo>
-                    <a:pt x="859470" y="1763197"/>
-                  </a:lnTo>
-                  <a:lnTo>
-                    <a:pt x="787847" y="1727667"/>
-                  </a:lnTo>
-                  <a:lnTo>
-                    <a:pt x="716225" y="1691404"/>
-                  </a:lnTo>
-                  <a:lnTo>
-                    <a:pt x="644602" y="1654392"/>
-                  </a:lnTo>
-                  <a:lnTo>
-                    <a:pt x="572980" y="1616615"/>
-                  </a:lnTo>
-                  <a:lnTo>
-                    <a:pt x="501357" y="1578059"/>
-                  </a:lnTo>
-                  <a:lnTo>
-                    <a:pt x="429735" y="1538706"/>
-                  </a:lnTo>
-                  <a:lnTo>
-                    <a:pt x="358112" y="1498540"/>
-                  </a:lnTo>
-                  <a:lnTo>
-                    <a:pt x="286490" y="1457546"/>
-                  </a:lnTo>
-                  <a:lnTo>
-                    <a:pt x="214867" y="1415704"/>
-                  </a:lnTo>
-                  <a:lnTo>
-                    <a:pt x="143245" y="1372999"/>
-                  </a:lnTo>
-                  <a:lnTo>
-                    <a:pt x="71622" y="1329411"/>
-                  </a:lnTo>
-                  <a:lnTo>
-                    <a:pt x="0" y="1284924"/>
+                    <a:pt x="1575695" y="123946"/>
+                  </a:lnTo>
+                  <a:lnTo>
+                    <a:pt x="1647318" y="301960"/>
+                  </a:lnTo>
+                  <a:lnTo>
+                    <a:pt x="1718940" y="470543"/>
+                  </a:lnTo>
+                  <a:lnTo>
+                    <a:pt x="1790563" y="630194"/>
+                  </a:lnTo>
+                  <a:lnTo>
+                    <a:pt x="1862185" y="781385"/>
+                  </a:lnTo>
+                  <a:lnTo>
+                    <a:pt x="1933808" y="924566"/>
+                  </a:lnTo>
+                  <a:lnTo>
+                    <a:pt x="2005430" y="1060161"/>
+                  </a:lnTo>
+                  <a:lnTo>
+                    <a:pt x="2077053" y="1188571"/>
+                  </a:lnTo>
+                  <a:lnTo>
+                    <a:pt x="2148675" y="1310178"/>
+                  </a:lnTo>
+                  <a:lnTo>
+                    <a:pt x="2220298" y="1425341"/>
+                  </a:lnTo>
+                  <a:lnTo>
+                    <a:pt x="2291920" y="1534403"/>
+                  </a:lnTo>
+                  <a:lnTo>
+                    <a:pt x="2363543" y="1637686"/>
+                  </a:lnTo>
+                  <a:lnTo>
+                    <a:pt x="2435165" y="1735497"/>
+                  </a:lnTo>
+                  <a:lnTo>
+                    <a:pt x="2506788" y="1828126"/>
+                  </a:lnTo>
+                  <a:lnTo>
+                    <a:pt x="2578410" y="1915847"/>
+                  </a:lnTo>
+                  <a:lnTo>
+                    <a:pt x="2650033" y="1998920"/>
+                  </a:lnTo>
+                  <a:lnTo>
+                    <a:pt x="2721655" y="2077591"/>
+                  </a:lnTo>
+                  <a:lnTo>
+                    <a:pt x="2793278" y="2152094"/>
+                  </a:lnTo>
+                  <a:lnTo>
+                    <a:pt x="2864901" y="2222650"/>
+                  </a:lnTo>
+                  <a:lnTo>
+                    <a:pt x="2936523" y="2289468"/>
+                  </a:lnTo>
+                  <a:lnTo>
+                    <a:pt x="3008146" y="2352745"/>
+                  </a:lnTo>
+                  <a:lnTo>
+                    <a:pt x="3079768" y="2412669"/>
+                  </a:lnTo>
+                  <a:lnTo>
+                    <a:pt x="3151391" y="2469419"/>
+                  </a:lnTo>
+                  <a:lnTo>
+                    <a:pt x="3223013" y="2523162"/>
+                  </a:lnTo>
+                  <a:lnTo>
+                    <a:pt x="3294636" y="2574057"/>
+                  </a:lnTo>
+                  <a:lnTo>
+                    <a:pt x="3366258" y="2622256"/>
+                  </a:lnTo>
+                  <a:lnTo>
+                    <a:pt x="3437881" y="2659456"/>
+                  </a:lnTo>
+                  <a:lnTo>
+                    <a:pt x="3509503" y="2676244"/>
+                  </a:lnTo>
+                  <a:lnTo>
+                    <a:pt x="3581126" y="2692689"/>
+                  </a:lnTo>
+                  <a:lnTo>
+                    <a:pt x="3652748" y="2708800"/>
+                  </a:lnTo>
+                  <a:lnTo>
+                    <a:pt x="3724371" y="2724582"/>
+                  </a:lnTo>
+                  <a:lnTo>
+                    <a:pt x="3795993" y="2740043"/>
+                  </a:lnTo>
+                  <a:lnTo>
+                    <a:pt x="3867616" y="2755189"/>
+                  </a:lnTo>
+                  <a:lnTo>
+                    <a:pt x="3939238" y="2770027"/>
+                  </a:lnTo>
+                  <a:lnTo>
+                    <a:pt x="4010861" y="2784562"/>
+                  </a:lnTo>
+                  <a:lnTo>
+                    <a:pt x="4082483" y="2798802"/>
+                  </a:lnTo>
+                  <a:lnTo>
+                    <a:pt x="4154106" y="2812751"/>
+                  </a:lnTo>
+                  <a:lnTo>
+                    <a:pt x="4225729" y="2826417"/>
+                  </a:lnTo>
+                  <a:lnTo>
+                    <a:pt x="4297351" y="2839804"/>
+                  </a:lnTo>
+                  <a:lnTo>
+                    <a:pt x="4368974" y="2852918"/>
+                  </a:lnTo>
+                  <a:lnTo>
+                    <a:pt x="4440596" y="2865765"/>
+                  </a:lnTo>
+                  <a:lnTo>
+                    <a:pt x="4512219" y="2878351"/>
+                  </a:lnTo>
+                  <a:lnTo>
+                    <a:pt x="4583841" y="2890680"/>
+                  </a:lnTo>
+                  <a:lnTo>
+                    <a:pt x="4655464" y="2902759"/>
+                  </a:lnTo>
+                  <a:lnTo>
+                    <a:pt x="4727086" y="2914591"/>
+                  </a:lnTo>
+                  <a:lnTo>
+                    <a:pt x="4798709" y="2926182"/>
+                  </a:lnTo>
+                  <a:lnTo>
+                    <a:pt x="4870331" y="2937538"/>
+                  </a:lnTo>
+                  <a:lnTo>
+                    <a:pt x="4941954" y="2948662"/>
+                  </a:lnTo>
+                  <a:lnTo>
+                    <a:pt x="5013576" y="2959559"/>
+                  </a:lnTo>
+                  <a:lnTo>
+                    <a:pt x="5085199" y="2970234"/>
+                  </a:lnTo>
+                  <a:lnTo>
+                    <a:pt x="5156821" y="2980693"/>
+                  </a:lnTo>
+                  <a:lnTo>
+                    <a:pt x="5228444" y="2990938"/>
+                  </a:lnTo>
+                  <a:lnTo>
+                    <a:pt x="5300066" y="3000974"/>
+                  </a:lnTo>
+                  <a:lnTo>
+                    <a:pt x="5371689" y="3010806"/>
+                  </a:lnTo>
+                  <a:lnTo>
+                    <a:pt x="5443311" y="3020438"/>
+                  </a:lnTo>
+                  <a:lnTo>
+                    <a:pt x="5514934" y="3029874"/>
+                  </a:lnTo>
+                  <a:lnTo>
+                    <a:pt x="5586557" y="3039117"/>
+                  </a:lnTo>
+                  <a:lnTo>
+                    <a:pt x="5658179" y="3048172"/>
+                  </a:lnTo>
+                  <a:lnTo>
+                    <a:pt x="5729802" y="3057043"/>
+                  </a:lnTo>
+                  <a:lnTo>
+                    <a:pt x="5801424" y="3065733"/>
+                  </a:lnTo>
+                  <a:lnTo>
+                    <a:pt x="5873047" y="3074246"/>
+                  </a:lnTo>
+                  <a:lnTo>
+                    <a:pt x="5944669" y="3082586"/>
+                  </a:lnTo>
+                  <a:lnTo>
+                    <a:pt x="6016292" y="3090756"/>
+                  </a:lnTo>
+                  <a:lnTo>
+                    <a:pt x="6087914" y="3098760"/>
+                  </a:lnTo>
+                  <a:lnTo>
+                    <a:pt x="6159537" y="3106600"/>
+                  </a:lnTo>
+                  <a:lnTo>
+                    <a:pt x="6231159" y="3114281"/>
+                  </a:lnTo>
+                  <a:lnTo>
+                    <a:pt x="6302782" y="3121806"/>
+                  </a:lnTo>
+                  <a:lnTo>
+                    <a:pt x="6374404" y="3129177"/>
+                  </a:lnTo>
+                  <a:lnTo>
+                    <a:pt x="6446027" y="3136398"/>
+                  </a:lnTo>
+                  <a:lnTo>
+                    <a:pt x="6517649" y="3143472"/>
+                  </a:lnTo>
+                  <a:lnTo>
+                    <a:pt x="6589272" y="3150402"/>
+                  </a:lnTo>
+                  <a:lnTo>
+                    <a:pt x="6660894" y="3157191"/>
+                  </a:lnTo>
+                  <a:lnTo>
+                    <a:pt x="6732517" y="3163841"/>
+                  </a:lnTo>
+                  <a:lnTo>
+                    <a:pt x="6804139" y="3170356"/>
+                  </a:lnTo>
+                  <a:lnTo>
+                    <a:pt x="6875762" y="3176739"/>
+                  </a:lnTo>
+                  <a:lnTo>
+                    <a:pt x="6947385" y="3182991"/>
+                  </a:lnTo>
+                  <a:lnTo>
+                    <a:pt x="7019007" y="3189116"/>
+                  </a:lnTo>
+                  <a:lnTo>
+                    <a:pt x="7090630" y="3195117"/>
+                  </a:lnTo>
+                  <a:lnTo>
+                    <a:pt x="7090630" y="3432949"/>
+                  </a:lnTo>
+                  <a:lnTo>
+                    <a:pt x="7019007" y="3430107"/>
+                  </a:lnTo>
+                  <a:lnTo>
+                    <a:pt x="6947385" y="3427106"/>
+                  </a:lnTo>
+                  <a:lnTo>
+                    <a:pt x="6875762" y="3423937"/>
+                  </a:lnTo>
+                  <a:lnTo>
+                    <a:pt x="6804139" y="3420591"/>
+                  </a:lnTo>
+                  <a:lnTo>
+                    <a:pt x="6732517" y="3417058"/>
+                  </a:lnTo>
+                  <a:lnTo>
+                    <a:pt x="6660894" y="3413327"/>
+                  </a:lnTo>
+                  <a:lnTo>
+                    <a:pt x="6589272" y="3409387"/>
+                  </a:lnTo>
+                  <a:lnTo>
+                    <a:pt x="6517649" y="3405226"/>
+                  </a:lnTo>
+                  <a:lnTo>
+                    <a:pt x="6446027" y="3400833"/>
+                  </a:lnTo>
+                  <a:lnTo>
+                    <a:pt x="6374404" y="3396195"/>
+                  </a:lnTo>
+                  <a:lnTo>
+                    <a:pt x="6302782" y="3391296"/>
+                  </a:lnTo>
+                  <a:lnTo>
+                    <a:pt x="6231159" y="3386124"/>
+                  </a:lnTo>
+                  <a:lnTo>
+                    <a:pt x="6159537" y="3380662"/>
+                  </a:lnTo>
+                  <a:lnTo>
+                    <a:pt x="6087914" y="3374895"/>
+                  </a:lnTo>
+                  <a:lnTo>
+                    <a:pt x="6016292" y="3368805"/>
+                  </a:lnTo>
+                  <a:lnTo>
+                    <a:pt x="5944669" y="3362374"/>
+                  </a:lnTo>
+                  <a:lnTo>
+                    <a:pt x="5873047" y="3355583"/>
+                  </a:lnTo>
+                  <a:lnTo>
+                    <a:pt x="5801424" y="3348413"/>
+                  </a:lnTo>
+                  <a:lnTo>
+                    <a:pt x="5729802" y="3340841"/>
+                  </a:lnTo>
+                  <a:lnTo>
+                    <a:pt x="5658179" y="3332846"/>
+                  </a:lnTo>
+                  <a:lnTo>
+                    <a:pt x="5586557" y="3324404"/>
+                  </a:lnTo>
+                  <a:lnTo>
+                    <a:pt x="5514934" y="3315489"/>
+                  </a:lnTo>
+                  <a:lnTo>
+                    <a:pt x="5443311" y="3306075"/>
+                  </a:lnTo>
+                  <a:lnTo>
+                    <a:pt x="5371689" y="3296135"/>
+                  </a:lnTo>
+                  <a:lnTo>
+                    <a:pt x="5300066" y="3285638"/>
+                  </a:lnTo>
+                  <a:lnTo>
+                    <a:pt x="5228444" y="3274554"/>
+                  </a:lnTo>
+                  <a:lnTo>
+                    <a:pt x="5156821" y="3262850"/>
+                  </a:lnTo>
+                  <a:lnTo>
+                    <a:pt x="5085199" y="3250492"/>
+                  </a:lnTo>
+                  <a:lnTo>
+                    <a:pt x="5013576" y="3237442"/>
+                  </a:lnTo>
+                  <a:lnTo>
+                    <a:pt x="4941954" y="3223661"/>
+                  </a:lnTo>
+                  <a:lnTo>
+                    <a:pt x="4870331" y="3209110"/>
+                  </a:lnTo>
+                  <a:lnTo>
+                    <a:pt x="4798709" y="3193745"/>
+                  </a:lnTo>
+                  <a:lnTo>
+                    <a:pt x="4727086" y="3177520"/>
+                  </a:lnTo>
+                  <a:lnTo>
+                    <a:pt x="4655464" y="3160387"/>
+                  </a:lnTo>
+                  <a:lnTo>
+                    <a:pt x="4583841" y="3142296"/>
+                  </a:lnTo>
+                  <a:lnTo>
+                    <a:pt x="4512219" y="3123192"/>
+                  </a:lnTo>
+                  <a:lnTo>
+                    <a:pt x="4440596" y="3103020"/>
+                  </a:lnTo>
+                  <a:lnTo>
+                    <a:pt x="4368974" y="3081719"/>
+                  </a:lnTo>
+                  <a:lnTo>
+                    <a:pt x="4297351" y="3059227"/>
+                  </a:lnTo>
+                  <a:lnTo>
+                    <a:pt x="4225729" y="3035476"/>
+                  </a:lnTo>
+                  <a:lnTo>
+                    <a:pt x="4154106" y="3010396"/>
+                  </a:lnTo>
+                  <a:lnTo>
+                    <a:pt x="4082483" y="2983913"/>
+                  </a:lnTo>
+                  <a:lnTo>
+                    <a:pt x="4010861" y="2955948"/>
+                  </a:lnTo>
+                  <a:lnTo>
+                    <a:pt x="3939238" y="2926419"/>
+                  </a:lnTo>
+                  <a:lnTo>
+                    <a:pt x="3867616" y="2895238"/>
+                  </a:lnTo>
+                  <a:lnTo>
+                    <a:pt x="3795993" y="2862312"/>
+                  </a:lnTo>
+                  <a:lnTo>
+                    <a:pt x="3724371" y="2827544"/>
+                  </a:lnTo>
+                  <a:lnTo>
+                    <a:pt x="3652748" y="2790830"/>
+                  </a:lnTo>
+                  <a:lnTo>
+                    <a:pt x="3581126" y="2752063"/>
+                  </a:lnTo>
+                  <a:lnTo>
+                    <a:pt x="3509503" y="2711127"/>
+                  </a:lnTo>
+                  <a:lnTo>
+                    <a:pt x="3437881" y="2667901"/>
+                  </a:lnTo>
+                  <a:lnTo>
+                    <a:pt x="3366258" y="2642320"/>
+                  </a:lnTo>
+                  <a:lnTo>
+                    <a:pt x="3294636" y="2624828"/>
+                  </a:lnTo>
+                  <a:lnTo>
+                    <a:pt x="3223013" y="2606971"/>
+                  </a:lnTo>
+                  <a:lnTo>
+                    <a:pt x="3151391" y="2588744"/>
+                  </a:lnTo>
+                  <a:lnTo>
+                    <a:pt x="3079768" y="2570137"/>
+                  </a:lnTo>
+                  <a:lnTo>
+                    <a:pt x="3008146" y="2551144"/>
+                  </a:lnTo>
+                  <a:lnTo>
+                    <a:pt x="2936523" y="2531756"/>
+                  </a:lnTo>
+                  <a:lnTo>
+                    <a:pt x="2864901" y="2511965"/>
+                  </a:lnTo>
+                  <a:lnTo>
+                    <a:pt x="2793278" y="2491763"/>
+                  </a:lnTo>
+                  <a:lnTo>
+                    <a:pt x="2721655" y="2471140"/>
+                  </a:lnTo>
+                  <a:lnTo>
+                    <a:pt x="2650033" y="2450089"/>
+                  </a:lnTo>
+                  <a:lnTo>
+                    <a:pt x="2578410" y="2428600"/>
+                  </a:lnTo>
+                  <a:lnTo>
+                    <a:pt x="2506788" y="2406664"/>
+                  </a:lnTo>
+                  <a:lnTo>
+                    <a:pt x="2435165" y="2384273"/>
+                  </a:lnTo>
+                  <a:lnTo>
+                    <a:pt x="2363543" y="2361415"/>
+                  </a:lnTo>
+                  <a:lnTo>
+                    <a:pt x="2291920" y="2338083"/>
+                  </a:lnTo>
+                  <a:lnTo>
+                    <a:pt x="2220298" y="2314266"/>
+                  </a:lnTo>
+                  <a:lnTo>
+                    <a:pt x="2148675" y="2289953"/>
+                  </a:lnTo>
+                  <a:lnTo>
+                    <a:pt x="2077053" y="2265135"/>
+                  </a:lnTo>
+                  <a:lnTo>
+                    <a:pt x="2005430" y="2239801"/>
+                  </a:lnTo>
+                  <a:lnTo>
+                    <a:pt x="1933808" y="2213940"/>
+                  </a:lnTo>
+                  <a:lnTo>
+                    <a:pt x="1862185" y="2187542"/>
+                  </a:lnTo>
+                  <a:lnTo>
+                    <a:pt x="1790563" y="2160595"/>
+                  </a:lnTo>
+                  <a:lnTo>
+                    <a:pt x="1718940" y="2133088"/>
+                  </a:lnTo>
+                  <a:lnTo>
+                    <a:pt x="1647318" y="2105009"/>
+                  </a:lnTo>
+                  <a:lnTo>
+                    <a:pt x="1575695" y="2076346"/>
+                  </a:lnTo>
+                  <a:lnTo>
+                    <a:pt x="1504073" y="2047087"/>
+                  </a:lnTo>
+                  <a:lnTo>
+                    <a:pt x="1432450" y="2017220"/>
+                  </a:lnTo>
+                  <a:lnTo>
+                    <a:pt x="1360827" y="1986732"/>
+                  </a:lnTo>
+                  <a:lnTo>
+                    <a:pt x="1289205" y="1955611"/>
+                  </a:lnTo>
+                  <a:lnTo>
+                    <a:pt x="1217582" y="1923842"/>
+                  </a:lnTo>
+                  <a:lnTo>
+                    <a:pt x="1145960" y="1891413"/>
+                  </a:lnTo>
+                  <a:lnTo>
+                    <a:pt x="1074337" y="1858309"/>
+                  </a:lnTo>
+                  <a:lnTo>
+                    <a:pt x="1002715" y="1824518"/>
+                  </a:lnTo>
+                  <a:lnTo>
+                    <a:pt x="931092" y="1790024"/>
+                  </a:lnTo>
+                  <a:lnTo>
+                    <a:pt x="859470" y="1754813"/>
+                  </a:lnTo>
+                  <a:lnTo>
+                    <a:pt x="787847" y="1718870"/>
+                  </a:lnTo>
+                  <a:lnTo>
+                    <a:pt x="716225" y="1682179"/>
+                  </a:lnTo>
+                  <a:lnTo>
+                    <a:pt x="644602" y="1644726"/>
+                  </a:lnTo>
+                  <a:lnTo>
+                    <a:pt x="572980" y="1606494"/>
+                  </a:lnTo>
+                  <a:lnTo>
+                    <a:pt x="501357" y="1567468"/>
+                  </a:lnTo>
+                  <a:lnTo>
+                    <a:pt x="429735" y="1527630"/>
+                  </a:lnTo>
+                  <a:lnTo>
+                    <a:pt x="358112" y="1486964"/>
+                  </a:lnTo>
+                  <a:lnTo>
+                    <a:pt x="286490" y="1445452"/>
+                  </a:lnTo>
+                  <a:lnTo>
+                    <a:pt x="214867" y="1403078"/>
+                  </a:lnTo>
+                  <a:lnTo>
+                    <a:pt x="143245" y="1359823"/>
+                  </a:lnTo>
+                  <a:lnTo>
+                    <a:pt x="71622" y="1315668"/>
+                  </a:lnTo>
+                  <a:lnTo>
+                    <a:pt x="0" y="1270595"/>
                   </a:lnTo>
                   <a:close/>
                 </a:path>
@@ -3527,249 +3527,249 @@
           </p:nvSpPr>
           <p:spPr>
             <a:xfrm>
-              <a:off x="2694767" y="2073503"/>
-              <a:ext cx="5567911" cy="3193093"/>
+              <a:off x="2700518" y="2073503"/>
+              <a:ext cx="5562161" cy="3195117"/>
             </a:xfrm>
             <a:custGeom>
               <a:avLst/>
               <a:pathLst>
-                <a:path w="5567911" h="3193093">
+                <a:path w="5562161" h="3195117">
                   <a:moveTo>
                     <a:pt x="0" y="0"/>
                   </a:moveTo>
                   <a:lnTo>
-                    <a:pt x="52977" y="138029"/>
-                  </a:lnTo>
-                  <a:lnTo>
-                    <a:pt x="124599" y="314779"/>
-                  </a:lnTo>
-                  <a:lnTo>
-                    <a:pt x="196222" y="482192"/>
-                  </a:lnTo>
-                  <a:lnTo>
-                    <a:pt x="267844" y="640760"/>
-                  </a:lnTo>
-                  <a:lnTo>
-                    <a:pt x="339467" y="790952"/>
-                  </a:lnTo>
-                  <a:lnTo>
-                    <a:pt x="411089" y="933209"/>
-                  </a:lnTo>
-                  <a:lnTo>
-                    <a:pt x="482712" y="1067951"/>
-                  </a:lnTo>
-                  <a:lnTo>
-                    <a:pt x="554334" y="1195575"/>
-                  </a:lnTo>
-                  <a:lnTo>
-                    <a:pt x="625957" y="1316456"/>
-                  </a:lnTo>
-                  <a:lnTo>
-                    <a:pt x="697579" y="1430951"/>
-                  </a:lnTo>
-                  <a:lnTo>
-                    <a:pt x="769202" y="1539398"/>
-                  </a:lnTo>
-                  <a:lnTo>
-                    <a:pt x="840824" y="1642116"/>
-                  </a:lnTo>
-                  <a:lnTo>
-                    <a:pt x="912447" y="1739407"/>
-                  </a:lnTo>
-                  <a:lnTo>
-                    <a:pt x="984069" y="1831558"/>
-                  </a:lnTo>
-                  <a:lnTo>
-                    <a:pt x="1055692" y="1918841"/>
-                  </a:lnTo>
-                  <a:lnTo>
-                    <a:pt x="1127315" y="2001514"/>
-                  </a:lnTo>
-                  <a:lnTo>
-                    <a:pt x="1198937" y="2079818"/>
-                  </a:lnTo>
-                  <a:lnTo>
-                    <a:pt x="1270560" y="2153986"/>
-                  </a:lnTo>
-                  <a:lnTo>
-                    <a:pt x="1342182" y="2224236"/>
-                  </a:lnTo>
-                  <a:lnTo>
-                    <a:pt x="1413805" y="2290774"/>
-                  </a:lnTo>
-                  <a:lnTo>
-                    <a:pt x="1485427" y="2353797"/>
-                  </a:lnTo>
-                  <a:lnTo>
-                    <a:pt x="1557050" y="2413491"/>
-                  </a:lnTo>
-                  <a:lnTo>
-                    <a:pt x="1628672" y="2470032"/>
-                  </a:lnTo>
-                  <a:lnTo>
-                    <a:pt x="1700295" y="2523585"/>
-                  </a:lnTo>
-                  <a:lnTo>
-                    <a:pt x="1771917" y="2574309"/>
-                  </a:lnTo>
-                  <a:lnTo>
-                    <a:pt x="1843540" y="2622354"/>
-                  </a:lnTo>
-                  <a:lnTo>
-                    <a:pt x="1915162" y="2659422"/>
-                  </a:lnTo>
-                  <a:lnTo>
-                    <a:pt x="1986785" y="2676100"/>
-                  </a:lnTo>
-                  <a:lnTo>
-                    <a:pt x="2058407" y="2692441"/>
-                  </a:lnTo>
-                  <a:lnTo>
-                    <a:pt x="2130030" y="2708451"/>
-                  </a:lnTo>
-                  <a:lnTo>
-                    <a:pt x="2201652" y="2724137"/>
-                  </a:lnTo>
-                  <a:lnTo>
-                    <a:pt x="2273275" y="2739506"/>
-                  </a:lnTo>
-                  <a:lnTo>
-                    <a:pt x="2344897" y="2754563"/>
-                  </a:lnTo>
-                  <a:lnTo>
-                    <a:pt x="2416520" y="2769317"/>
-                  </a:lnTo>
-                  <a:lnTo>
-                    <a:pt x="2488143" y="2783771"/>
-                  </a:lnTo>
-                  <a:lnTo>
-                    <a:pt x="2559765" y="2797933"/>
-                  </a:lnTo>
-                  <a:lnTo>
-                    <a:pt x="2631388" y="2811809"/>
-                  </a:lnTo>
-                  <a:lnTo>
-                    <a:pt x="2703010" y="2825404"/>
-                  </a:lnTo>
-                  <a:lnTo>
-                    <a:pt x="2774633" y="2838724"/>
-                  </a:lnTo>
-                  <a:lnTo>
-                    <a:pt x="2846255" y="2851774"/>
-                  </a:lnTo>
-                  <a:lnTo>
-                    <a:pt x="2917878" y="2864560"/>
-                  </a:lnTo>
-                  <a:lnTo>
-                    <a:pt x="2989500" y="2877088"/>
-                  </a:lnTo>
-                  <a:lnTo>
-                    <a:pt x="3061123" y="2889362"/>
-                  </a:lnTo>
-                  <a:lnTo>
-                    <a:pt x="3132745" y="2901388"/>
-                  </a:lnTo>
-                  <a:lnTo>
-                    <a:pt x="3204368" y="2913170"/>
-                  </a:lnTo>
-                  <a:lnTo>
-                    <a:pt x="3275990" y="2924715"/>
-                  </a:lnTo>
-                  <a:lnTo>
-                    <a:pt x="3347613" y="2936025"/>
-                  </a:lnTo>
-                  <a:lnTo>
-                    <a:pt x="3419235" y="2947107"/>
-                  </a:lnTo>
-                  <a:lnTo>
-                    <a:pt x="3490858" y="2957964"/>
-                  </a:lnTo>
-                  <a:lnTo>
-                    <a:pt x="3562480" y="2968602"/>
-                  </a:lnTo>
-                  <a:lnTo>
-                    <a:pt x="3634103" y="2979025"/>
-                  </a:lnTo>
-                  <a:lnTo>
-                    <a:pt x="3705725" y="2989236"/>
-                  </a:lnTo>
-                  <a:lnTo>
-                    <a:pt x="3777348" y="2999242"/>
-                  </a:lnTo>
-                  <a:lnTo>
-                    <a:pt x="3848971" y="3009044"/>
-                  </a:lnTo>
-                  <a:lnTo>
-                    <a:pt x="3920593" y="3018649"/>
-                  </a:lnTo>
-                  <a:lnTo>
-                    <a:pt x="3992216" y="3028059"/>
-                  </a:lnTo>
-                  <a:lnTo>
-                    <a:pt x="4063838" y="3037278"/>
-                  </a:lnTo>
-                  <a:lnTo>
-                    <a:pt x="4135461" y="3046311"/>
-                  </a:lnTo>
-                  <a:lnTo>
-                    <a:pt x="4207083" y="3055162"/>
-                  </a:lnTo>
-                  <a:lnTo>
-                    <a:pt x="4278706" y="3063833"/>
-                  </a:lnTo>
-                  <a:lnTo>
-                    <a:pt x="4350328" y="3072329"/>
-                  </a:lnTo>
-                  <a:lnTo>
-                    <a:pt x="4421951" y="3080653"/>
-                  </a:lnTo>
-                  <a:lnTo>
-                    <a:pt x="4493573" y="3088808"/>
-                  </a:lnTo>
-                  <a:lnTo>
-                    <a:pt x="4565196" y="3096799"/>
-                  </a:lnTo>
-                  <a:lnTo>
-                    <a:pt x="4636818" y="3104628"/>
-                  </a:lnTo>
-                  <a:lnTo>
-                    <a:pt x="4708441" y="3112298"/>
-                  </a:lnTo>
-                  <a:lnTo>
-                    <a:pt x="4780063" y="3119814"/>
-                  </a:lnTo>
-                  <a:lnTo>
-                    <a:pt x="4851686" y="3127177"/>
-                  </a:lnTo>
-                  <a:lnTo>
-                    <a:pt x="4923308" y="3134391"/>
-                  </a:lnTo>
-                  <a:lnTo>
-                    <a:pt x="4994931" y="3141459"/>
-                  </a:lnTo>
-                  <a:lnTo>
-                    <a:pt x="5066553" y="3148385"/>
-                  </a:lnTo>
-                  <a:lnTo>
-                    <a:pt x="5138176" y="3155170"/>
-                  </a:lnTo>
-                  <a:lnTo>
-                    <a:pt x="5209799" y="3161818"/>
-                  </a:lnTo>
-                  <a:lnTo>
-                    <a:pt x="5281421" y="3168331"/>
-                  </a:lnTo>
-                  <a:lnTo>
-                    <a:pt x="5353044" y="3174713"/>
-                  </a:lnTo>
-                  <a:lnTo>
-                    <a:pt x="5424666" y="3180965"/>
-                  </a:lnTo>
-                  <a:lnTo>
-                    <a:pt x="5496289" y="3187091"/>
-                  </a:lnTo>
-                  <a:lnTo>
-                    <a:pt x="5567911" y="3193093"/>
+                    <a:pt x="47226" y="123946"/>
+                  </a:lnTo>
+                  <a:lnTo>
+                    <a:pt x="118849" y="301960"/>
+                  </a:lnTo>
+                  <a:lnTo>
+                    <a:pt x="190471" y="470543"/>
+                  </a:lnTo>
+                  <a:lnTo>
+                    <a:pt x="262094" y="630194"/>
+                  </a:lnTo>
+                  <a:lnTo>
+                    <a:pt x="333716" y="781385"/>
+                  </a:lnTo>
+                  <a:lnTo>
+                    <a:pt x="405339" y="924566"/>
+                  </a:lnTo>
+                  <a:lnTo>
+                    <a:pt x="476961" y="1060161"/>
+                  </a:lnTo>
+                  <a:lnTo>
+                    <a:pt x="548584" y="1188571"/>
+                  </a:lnTo>
+                  <a:lnTo>
+                    <a:pt x="620206" y="1310178"/>
+                  </a:lnTo>
+                  <a:lnTo>
+                    <a:pt x="691829" y="1425341"/>
+                  </a:lnTo>
+                  <a:lnTo>
+                    <a:pt x="763451" y="1534403"/>
+                  </a:lnTo>
+                  <a:lnTo>
+                    <a:pt x="835074" y="1637686"/>
+                  </a:lnTo>
+                  <a:lnTo>
+                    <a:pt x="906696" y="1735497"/>
+                  </a:lnTo>
+                  <a:lnTo>
+                    <a:pt x="978319" y="1828126"/>
+                  </a:lnTo>
+                  <a:lnTo>
+                    <a:pt x="1049941" y="1915847"/>
+                  </a:lnTo>
+                  <a:lnTo>
+                    <a:pt x="1121564" y="1998920"/>
+                  </a:lnTo>
+                  <a:lnTo>
+                    <a:pt x="1193186" y="2077591"/>
+                  </a:lnTo>
+                  <a:lnTo>
+                    <a:pt x="1264809" y="2152094"/>
+                  </a:lnTo>
+                  <a:lnTo>
+                    <a:pt x="1336432" y="2222650"/>
+                  </a:lnTo>
+                  <a:lnTo>
+                    <a:pt x="1408054" y="2289468"/>
+                  </a:lnTo>
+                  <a:lnTo>
+                    <a:pt x="1479677" y="2352745"/>
+                  </a:lnTo>
+                  <a:lnTo>
+                    <a:pt x="1551299" y="2412669"/>
+                  </a:lnTo>
+                  <a:lnTo>
+                    <a:pt x="1622922" y="2469419"/>
+                  </a:lnTo>
+                  <a:lnTo>
+                    <a:pt x="1694544" y="2523162"/>
+                  </a:lnTo>
+                  <a:lnTo>
+                    <a:pt x="1766167" y="2574057"/>
+                  </a:lnTo>
+                  <a:lnTo>
+                    <a:pt x="1837789" y="2622256"/>
+                  </a:lnTo>
+                  <a:lnTo>
+                    <a:pt x="1909412" y="2659456"/>
+                  </a:lnTo>
+                  <a:lnTo>
+                    <a:pt x="1981034" y="2676244"/>
+                  </a:lnTo>
+                  <a:lnTo>
+                    <a:pt x="2052657" y="2692689"/>
+                  </a:lnTo>
+                  <a:lnTo>
+                    <a:pt x="2124279" y="2708800"/>
+                  </a:lnTo>
+                  <a:lnTo>
+                    <a:pt x="2195902" y="2724582"/>
+                  </a:lnTo>
+                  <a:lnTo>
+                    <a:pt x="2267524" y="2740043"/>
+                  </a:lnTo>
+                  <a:lnTo>
+                    <a:pt x="2339147" y="2755189"/>
+                  </a:lnTo>
+                  <a:lnTo>
+                    <a:pt x="2410769" y="2770027"/>
+                  </a:lnTo>
+                  <a:lnTo>
+                    <a:pt x="2482392" y="2784562"/>
+                  </a:lnTo>
+                  <a:lnTo>
+                    <a:pt x="2554014" y="2798802"/>
+                  </a:lnTo>
+                  <a:lnTo>
+                    <a:pt x="2625637" y="2812751"/>
+                  </a:lnTo>
+                  <a:lnTo>
+                    <a:pt x="2697260" y="2826417"/>
+                  </a:lnTo>
+                  <a:lnTo>
+                    <a:pt x="2768882" y="2839804"/>
+                  </a:lnTo>
+                  <a:lnTo>
+                    <a:pt x="2840505" y="2852918"/>
+                  </a:lnTo>
+                  <a:lnTo>
+                    <a:pt x="2912127" y="2865765"/>
+                  </a:lnTo>
+                  <a:lnTo>
+                    <a:pt x="2983750" y="2878351"/>
+                  </a:lnTo>
+                  <a:lnTo>
+                    <a:pt x="3055372" y="2890680"/>
+                  </a:lnTo>
+                  <a:lnTo>
+                    <a:pt x="3126995" y="2902759"/>
+                  </a:lnTo>
+                  <a:lnTo>
+                    <a:pt x="3198617" y="2914591"/>
+                  </a:lnTo>
+                  <a:lnTo>
+                    <a:pt x="3270240" y="2926182"/>
+                  </a:lnTo>
+                  <a:lnTo>
+                    <a:pt x="3341862" y="2937538"/>
+                  </a:lnTo>
+                  <a:lnTo>
+                    <a:pt x="3413485" y="2948662"/>
+                  </a:lnTo>
+                  <a:lnTo>
+                    <a:pt x="3485107" y="2959559"/>
+                  </a:lnTo>
+                  <a:lnTo>
+                    <a:pt x="3556730" y="2970234"/>
+                  </a:lnTo>
+                  <a:lnTo>
+                    <a:pt x="3628352" y="2980693"/>
+                  </a:lnTo>
+                  <a:lnTo>
+                    <a:pt x="3699975" y="2990938"/>
+                  </a:lnTo>
+                  <a:lnTo>
+                    <a:pt x="3771597" y="3000974"/>
+                  </a:lnTo>
+                  <a:lnTo>
+                    <a:pt x="3843220" y="3010806"/>
+                  </a:lnTo>
+                  <a:lnTo>
+                    <a:pt x="3914842" y="3020438"/>
+                  </a:lnTo>
+                  <a:lnTo>
+                    <a:pt x="3986465" y="3029874"/>
+                  </a:lnTo>
+                  <a:lnTo>
+                    <a:pt x="4058088" y="3039117"/>
+                  </a:lnTo>
+                  <a:lnTo>
+                    <a:pt x="4129710" y="3048172"/>
+                  </a:lnTo>
+                  <a:lnTo>
+                    <a:pt x="4201333" y="3057043"/>
+                  </a:lnTo>
+                  <a:lnTo>
+                    <a:pt x="4272955" y="3065733"/>
+                  </a:lnTo>
+                  <a:lnTo>
+                    <a:pt x="4344578" y="3074246"/>
+                  </a:lnTo>
+                  <a:lnTo>
+                    <a:pt x="4416200" y="3082586"/>
+                  </a:lnTo>
+                  <a:lnTo>
+                    <a:pt x="4487823" y="3090756"/>
+                  </a:lnTo>
+                  <a:lnTo>
+                    <a:pt x="4559445" y="3098760"/>
+                  </a:lnTo>
+                  <a:lnTo>
+                    <a:pt x="4631068" y="3106600"/>
+                  </a:lnTo>
+                  <a:lnTo>
+                    <a:pt x="4702690" y="3114281"/>
+                  </a:lnTo>
+                  <a:lnTo>
+                    <a:pt x="4774313" y="3121806"/>
+                  </a:lnTo>
+                  <a:lnTo>
+                    <a:pt x="4845935" y="3129177"/>
+                  </a:lnTo>
+                  <a:lnTo>
+                    <a:pt x="4917558" y="3136398"/>
+                  </a:lnTo>
+                  <a:lnTo>
+                    <a:pt x="4989180" y="3143472"/>
+                  </a:lnTo>
+                  <a:lnTo>
+                    <a:pt x="5060803" y="3150402"/>
+                  </a:lnTo>
+                  <a:lnTo>
+                    <a:pt x="5132425" y="3157191"/>
+                  </a:lnTo>
+                  <a:lnTo>
+                    <a:pt x="5204048" y="3163841"/>
+                  </a:lnTo>
+                  <a:lnTo>
+                    <a:pt x="5275670" y="3170356"/>
+                  </a:lnTo>
+                  <a:lnTo>
+                    <a:pt x="5347293" y="3176739"/>
+                  </a:lnTo>
+                  <a:lnTo>
+                    <a:pt x="5418916" y="3182991"/>
+                  </a:lnTo>
+                  <a:lnTo>
+                    <a:pt x="5490538" y="3189116"/>
+                  </a:lnTo>
+                  <a:lnTo>
+                    <a:pt x="5562161" y="3195117"/>
                   </a:lnTo>
                 </a:path>
               </a:pathLst>
@@ -3789,309 +3789,309 @@
           </p:nvSpPr>
           <p:spPr>
             <a:xfrm>
-              <a:off x="1172049" y="3358427"/>
-              <a:ext cx="7090630" cy="2147597"/>
+              <a:off x="1172049" y="3344098"/>
+              <a:ext cx="7090630" cy="2162353"/>
             </a:xfrm>
             <a:custGeom>
               <a:avLst/>
               <a:pathLst>
-                <a:path w="7090630" h="2147597">
+                <a:path w="7090630" h="2162353">
                   <a:moveTo>
-                    <a:pt x="7090630" y="2147597"/>
+                    <a:pt x="7090630" y="2162353"/>
                   </a:moveTo>
                   <a:lnTo>
-                    <a:pt x="7019007" y="2144740"/>
-                  </a:lnTo>
-                  <a:lnTo>
-                    <a:pt x="6947385" y="2141723"/>
-                  </a:lnTo>
-                  <a:lnTo>
-                    <a:pt x="6875762" y="2138539"/>
-                  </a:lnTo>
-                  <a:lnTo>
-                    <a:pt x="6804139" y="2135176"/>
-                  </a:lnTo>
-                  <a:lnTo>
-                    <a:pt x="6732517" y="2131627"/>
-                  </a:lnTo>
-                  <a:lnTo>
-                    <a:pt x="6660894" y="2127879"/>
-                  </a:lnTo>
-                  <a:lnTo>
-                    <a:pt x="6589272" y="2123922"/>
-                  </a:lnTo>
-                  <a:lnTo>
-                    <a:pt x="6517649" y="2119744"/>
-                  </a:lnTo>
-                  <a:lnTo>
-                    <a:pt x="6446027" y="2115334"/>
-                  </a:lnTo>
-                  <a:lnTo>
-                    <a:pt x="6374404" y="2110677"/>
-                  </a:lnTo>
-                  <a:lnTo>
-                    <a:pt x="6302782" y="2105761"/>
-                  </a:lnTo>
-                  <a:lnTo>
-                    <a:pt x="6231159" y="2100570"/>
-                  </a:lnTo>
-                  <a:lnTo>
-                    <a:pt x="6159537" y="2095090"/>
-                  </a:lnTo>
-                  <a:lnTo>
-                    <a:pt x="6087914" y="2089305"/>
-                  </a:lnTo>
-                  <a:lnTo>
-                    <a:pt x="6016292" y="2083196"/>
-                  </a:lnTo>
-                  <a:lnTo>
-                    <a:pt x="5944669" y="2076747"/>
-                  </a:lnTo>
-                  <a:lnTo>
-                    <a:pt x="5873047" y="2069938"/>
-                  </a:lnTo>
-                  <a:lnTo>
-                    <a:pt x="5801424" y="2062750"/>
-                  </a:lnTo>
-                  <a:lnTo>
-                    <a:pt x="5729802" y="2055160"/>
-                  </a:lnTo>
-                  <a:lnTo>
-                    <a:pt x="5658179" y="2047148"/>
-                  </a:lnTo>
-                  <a:lnTo>
-                    <a:pt x="5586557" y="2038688"/>
-                  </a:lnTo>
-                  <a:lnTo>
-                    <a:pt x="5514934" y="2029756"/>
-                  </a:lnTo>
-                  <a:lnTo>
-                    <a:pt x="5443311" y="2020327"/>
-                  </a:lnTo>
-                  <a:lnTo>
-                    <a:pt x="5371689" y="2010371"/>
-                  </a:lnTo>
-                  <a:lnTo>
-                    <a:pt x="5300066" y="1999860"/>
-                  </a:lnTo>
-                  <a:lnTo>
-                    <a:pt x="5228444" y="1988763"/>
-                  </a:lnTo>
-                  <a:lnTo>
-                    <a:pt x="5156821" y="1977047"/>
-                  </a:lnTo>
-                  <a:lnTo>
-                    <a:pt x="5085199" y="1964677"/>
-                  </a:lnTo>
-                  <a:lnTo>
-                    <a:pt x="5013576" y="1951618"/>
-                  </a:lnTo>
-                  <a:lnTo>
-                    <a:pt x="4941954" y="1937830"/>
-                  </a:lnTo>
-                  <a:lnTo>
-                    <a:pt x="4870331" y="1923273"/>
-                  </a:lnTo>
-                  <a:lnTo>
-                    <a:pt x="4798709" y="1907904"/>
-                  </a:lnTo>
-                  <a:lnTo>
-                    <a:pt x="4727086" y="1891678"/>
-                  </a:lnTo>
-                  <a:lnTo>
-                    <a:pt x="4655464" y="1874547"/>
-                  </a:lnTo>
-                  <a:lnTo>
-                    <a:pt x="4583841" y="1856460"/>
-                  </a:lnTo>
-                  <a:lnTo>
-                    <a:pt x="4512219" y="1837365"/>
-                  </a:lnTo>
-                  <a:lnTo>
-                    <a:pt x="4440596" y="1817204"/>
-                  </a:lnTo>
-                  <a:lnTo>
-                    <a:pt x="4368974" y="1795920"/>
-                  </a:lnTo>
-                  <a:lnTo>
-                    <a:pt x="4297351" y="1773448"/>
-                  </a:lnTo>
-                  <a:lnTo>
-                    <a:pt x="4225729" y="1749722"/>
-                  </a:lnTo>
-                  <a:lnTo>
-                    <a:pt x="4154106" y="1724673"/>
-                  </a:lnTo>
-                  <a:lnTo>
-                    <a:pt x="4082483" y="1698228"/>
-                  </a:lnTo>
-                  <a:lnTo>
-                    <a:pt x="4010861" y="1670307"/>
-                  </a:lnTo>
-                  <a:lnTo>
-                    <a:pt x="3939238" y="1640829"/>
-                  </a:lnTo>
-                  <a:lnTo>
-                    <a:pt x="3867616" y="1609706"/>
-                  </a:lnTo>
-                  <a:lnTo>
-                    <a:pt x="3795993" y="1576848"/>
-                  </a:lnTo>
-                  <a:lnTo>
-                    <a:pt x="3724371" y="1542157"/>
-                  </a:lnTo>
-                  <a:lnTo>
-                    <a:pt x="3652748" y="1505532"/>
-                  </a:lnTo>
-                  <a:lnTo>
-                    <a:pt x="3581126" y="1466863"/>
-                  </a:lnTo>
-                  <a:lnTo>
-                    <a:pt x="3509503" y="1426038"/>
-                  </a:lnTo>
-                  <a:lnTo>
-                    <a:pt x="3437881" y="1382936"/>
-                  </a:lnTo>
-                  <a:lnTo>
-                    <a:pt x="3366258" y="1357475"/>
-                  </a:lnTo>
-                  <a:lnTo>
-                    <a:pt x="3294636" y="1340101"/>
-                  </a:lnTo>
-                  <a:lnTo>
-                    <a:pt x="3223013" y="1322369"/>
-                  </a:lnTo>
-                  <a:lnTo>
-                    <a:pt x="3151391" y="1304270"/>
-                  </a:lnTo>
-                  <a:lnTo>
-                    <a:pt x="3079768" y="1285797"/>
-                  </a:lnTo>
-                  <a:lnTo>
-                    <a:pt x="3008146" y="1266943"/>
-                  </a:lnTo>
-                  <a:lnTo>
-                    <a:pt x="2936523" y="1247699"/>
-                  </a:lnTo>
-                  <a:lnTo>
-                    <a:pt x="2864901" y="1228059"/>
-                  </a:lnTo>
-                  <a:lnTo>
-                    <a:pt x="2793278" y="1208012"/>
-                  </a:lnTo>
-                  <a:lnTo>
-                    <a:pt x="2721655" y="1187552"/>
-                  </a:lnTo>
-                  <a:lnTo>
-                    <a:pt x="2650033" y="1166669"/>
-                  </a:lnTo>
-                  <a:lnTo>
-                    <a:pt x="2578410" y="1145355"/>
-                  </a:lnTo>
-                  <a:lnTo>
-                    <a:pt x="2506788" y="1123600"/>
-                  </a:lnTo>
-                  <a:lnTo>
-                    <a:pt x="2435165" y="1101397"/>
-                  </a:lnTo>
-                  <a:lnTo>
-                    <a:pt x="2363543" y="1078735"/>
-                  </a:lnTo>
-                  <a:lnTo>
-                    <a:pt x="2291920" y="1055605"/>
-                  </a:lnTo>
-                  <a:lnTo>
-                    <a:pt x="2220298" y="1031997"/>
-                  </a:lnTo>
-                  <a:lnTo>
-                    <a:pt x="2148675" y="1007902"/>
-                  </a:lnTo>
-                  <a:lnTo>
-                    <a:pt x="2077053" y="983309"/>
-                  </a:lnTo>
-                  <a:lnTo>
-                    <a:pt x="2005430" y="958209"/>
-                  </a:lnTo>
-                  <a:lnTo>
-                    <a:pt x="1933808" y="932590"/>
-                  </a:lnTo>
-                  <a:lnTo>
-                    <a:pt x="1862185" y="906442"/>
-                  </a:lnTo>
-                  <a:lnTo>
-                    <a:pt x="1790563" y="879754"/>
-                  </a:lnTo>
-                  <a:lnTo>
-                    <a:pt x="1718940" y="852515"/>
-                  </a:lnTo>
-                  <a:lnTo>
-                    <a:pt x="1647318" y="824714"/>
-                  </a:lnTo>
-                  <a:lnTo>
-                    <a:pt x="1575695" y="796338"/>
-                  </a:lnTo>
-                  <a:lnTo>
-                    <a:pt x="1504073" y="767376"/>
-                  </a:lnTo>
-                  <a:lnTo>
-                    <a:pt x="1432450" y="737817"/>
-                  </a:lnTo>
-                  <a:lnTo>
-                    <a:pt x="1360827" y="707647"/>
-                  </a:lnTo>
-                  <a:lnTo>
-                    <a:pt x="1289205" y="676854"/>
-                  </a:lnTo>
-                  <a:lnTo>
-                    <a:pt x="1217582" y="645425"/>
-                  </a:lnTo>
-                  <a:lnTo>
-                    <a:pt x="1145960" y="613347"/>
-                  </a:lnTo>
-                  <a:lnTo>
-                    <a:pt x="1074337" y="580606"/>
-                  </a:lnTo>
-                  <a:lnTo>
-                    <a:pt x="1002715" y="547190"/>
-                  </a:lnTo>
-                  <a:lnTo>
-                    <a:pt x="931092" y="513083"/>
-                  </a:lnTo>
-                  <a:lnTo>
-                    <a:pt x="859470" y="478273"/>
-                  </a:lnTo>
-                  <a:lnTo>
-                    <a:pt x="787847" y="442743"/>
-                  </a:lnTo>
-                  <a:lnTo>
-                    <a:pt x="716225" y="406480"/>
-                  </a:lnTo>
-                  <a:lnTo>
-                    <a:pt x="644602" y="369467"/>
-                  </a:lnTo>
-                  <a:lnTo>
-                    <a:pt x="572980" y="331691"/>
-                  </a:lnTo>
-                  <a:lnTo>
-                    <a:pt x="501357" y="293134"/>
-                  </a:lnTo>
-                  <a:lnTo>
-                    <a:pt x="429735" y="253781"/>
-                  </a:lnTo>
-                  <a:lnTo>
-                    <a:pt x="358112" y="213616"/>
-                  </a:lnTo>
-                  <a:lnTo>
-                    <a:pt x="286490" y="172621"/>
-                  </a:lnTo>
-                  <a:lnTo>
-                    <a:pt x="214867" y="130780"/>
-                  </a:lnTo>
-                  <a:lnTo>
-                    <a:pt x="143245" y="88074"/>
-                  </a:lnTo>
-                  <a:lnTo>
-                    <a:pt x="71622" y="44487"/>
+                    <a:pt x="7019007" y="2159511"/>
+                  </a:lnTo>
+                  <a:lnTo>
+                    <a:pt x="6947385" y="2156510"/>
+                  </a:lnTo>
+                  <a:lnTo>
+                    <a:pt x="6875762" y="2153342"/>
+                  </a:lnTo>
+                  <a:lnTo>
+                    <a:pt x="6804139" y="2149995"/>
+                  </a:lnTo>
+                  <a:lnTo>
+                    <a:pt x="6732517" y="2146462"/>
+                  </a:lnTo>
+                  <a:lnTo>
+                    <a:pt x="6660894" y="2142731"/>
+                  </a:lnTo>
+                  <a:lnTo>
+                    <a:pt x="6589272" y="2138791"/>
+                  </a:lnTo>
+                  <a:lnTo>
+                    <a:pt x="6517649" y="2134631"/>
+                  </a:lnTo>
+                  <a:lnTo>
+                    <a:pt x="6446027" y="2130238"/>
+                  </a:lnTo>
+                  <a:lnTo>
+                    <a:pt x="6374404" y="2125599"/>
+                  </a:lnTo>
+                  <a:lnTo>
+                    <a:pt x="6302782" y="2120701"/>
+                  </a:lnTo>
+                  <a:lnTo>
+                    <a:pt x="6231159" y="2115528"/>
+                  </a:lnTo>
+                  <a:lnTo>
+                    <a:pt x="6159537" y="2110066"/>
+                  </a:lnTo>
+                  <a:lnTo>
+                    <a:pt x="6087914" y="2104299"/>
+                  </a:lnTo>
+                  <a:lnTo>
+                    <a:pt x="6016292" y="2098209"/>
+                  </a:lnTo>
+                  <a:lnTo>
+                    <a:pt x="5944669" y="2091778"/>
+                  </a:lnTo>
+                  <a:lnTo>
+                    <a:pt x="5873047" y="2084988"/>
+                  </a:lnTo>
+                  <a:lnTo>
+                    <a:pt x="5801424" y="2077817"/>
+                  </a:lnTo>
+                  <a:lnTo>
+                    <a:pt x="5729802" y="2070246"/>
+                  </a:lnTo>
+                  <a:lnTo>
+                    <a:pt x="5658179" y="2062250"/>
+                  </a:lnTo>
+                  <a:lnTo>
+                    <a:pt x="5586557" y="2053808"/>
+                  </a:lnTo>
+                  <a:lnTo>
+                    <a:pt x="5514934" y="2044893"/>
+                  </a:lnTo>
+                  <a:lnTo>
+                    <a:pt x="5443311" y="2035479"/>
+                  </a:lnTo>
+                  <a:lnTo>
+                    <a:pt x="5371689" y="2025539"/>
+                  </a:lnTo>
+                  <a:lnTo>
+                    <a:pt x="5300066" y="2015042"/>
+                  </a:lnTo>
+                  <a:lnTo>
+                    <a:pt x="5228444" y="2003959"/>
+                  </a:lnTo>
+                  <a:lnTo>
+                    <a:pt x="5156821" y="1992255"/>
+                  </a:lnTo>
+                  <a:lnTo>
+                    <a:pt x="5085199" y="1979896"/>
+                  </a:lnTo>
+                  <a:lnTo>
+                    <a:pt x="5013576" y="1966846"/>
+                  </a:lnTo>
+                  <a:lnTo>
+                    <a:pt x="4941954" y="1953066"/>
+                  </a:lnTo>
+                  <a:lnTo>
+                    <a:pt x="4870331" y="1938514"/>
+                  </a:lnTo>
+                  <a:lnTo>
+                    <a:pt x="4798709" y="1923149"/>
+                  </a:lnTo>
+                  <a:lnTo>
+                    <a:pt x="4727086" y="1906924"/>
+                  </a:lnTo>
+                  <a:lnTo>
+                    <a:pt x="4655464" y="1889791"/>
+                  </a:lnTo>
+                  <a:lnTo>
+                    <a:pt x="4583841" y="1871700"/>
+                  </a:lnTo>
+                  <a:lnTo>
+                    <a:pt x="4512219" y="1852597"/>
+                  </a:lnTo>
+                  <a:lnTo>
+                    <a:pt x="4440596" y="1832424"/>
+                  </a:lnTo>
+                  <a:lnTo>
+                    <a:pt x="4368974" y="1811123"/>
+                  </a:lnTo>
+                  <a:lnTo>
+                    <a:pt x="4297351" y="1788631"/>
+                  </a:lnTo>
+                  <a:lnTo>
+                    <a:pt x="4225729" y="1764880"/>
+                  </a:lnTo>
+                  <a:lnTo>
+                    <a:pt x="4154106" y="1739800"/>
+                  </a:lnTo>
+                  <a:lnTo>
+                    <a:pt x="4082483" y="1713317"/>
+                  </a:lnTo>
+                  <a:lnTo>
+                    <a:pt x="4010861" y="1685352"/>
+                  </a:lnTo>
+                  <a:lnTo>
+                    <a:pt x="3939238" y="1655823"/>
+                  </a:lnTo>
+                  <a:lnTo>
+                    <a:pt x="3867616" y="1624642"/>
+                  </a:lnTo>
+                  <a:lnTo>
+                    <a:pt x="3795993" y="1591716"/>
+                  </a:lnTo>
+                  <a:lnTo>
+                    <a:pt x="3724371" y="1556948"/>
+                  </a:lnTo>
+                  <a:lnTo>
+                    <a:pt x="3652748" y="1520235"/>
+                  </a:lnTo>
+                  <a:lnTo>
+                    <a:pt x="3581126" y="1481467"/>
+                  </a:lnTo>
+                  <a:lnTo>
+                    <a:pt x="3509503" y="1440531"/>
+                  </a:lnTo>
+                  <a:lnTo>
+                    <a:pt x="3437881" y="1397305"/>
+                  </a:lnTo>
+                  <a:lnTo>
+                    <a:pt x="3366258" y="1371724"/>
+                  </a:lnTo>
+                  <a:lnTo>
+                    <a:pt x="3294636" y="1354232"/>
+                  </a:lnTo>
+                  <a:lnTo>
+                    <a:pt x="3223013" y="1336376"/>
+                  </a:lnTo>
+                  <a:lnTo>
+                    <a:pt x="3151391" y="1318148"/>
+                  </a:lnTo>
+                  <a:lnTo>
+                    <a:pt x="3079768" y="1299542"/>
+                  </a:lnTo>
+                  <a:lnTo>
+                    <a:pt x="3008146" y="1280549"/>
+                  </a:lnTo>
+                  <a:lnTo>
+                    <a:pt x="2936523" y="1261160"/>
+                  </a:lnTo>
+                  <a:lnTo>
+                    <a:pt x="2864901" y="1241369"/>
+                  </a:lnTo>
+                  <a:lnTo>
+                    <a:pt x="2793278" y="1221167"/>
+                  </a:lnTo>
+                  <a:lnTo>
+                    <a:pt x="2721655" y="1200544"/>
+                  </a:lnTo>
+                  <a:lnTo>
+                    <a:pt x="2650033" y="1179493"/>
+                  </a:lnTo>
+                  <a:lnTo>
+                    <a:pt x="2578410" y="1158004"/>
+                  </a:lnTo>
+                  <a:lnTo>
+                    <a:pt x="2506788" y="1136068"/>
+                  </a:lnTo>
+                  <a:lnTo>
+                    <a:pt x="2435165" y="1113677"/>
+                  </a:lnTo>
+                  <a:lnTo>
+                    <a:pt x="2363543" y="1090820"/>
+                  </a:lnTo>
+                  <a:lnTo>
+                    <a:pt x="2291920" y="1067487"/>
+                  </a:lnTo>
+                  <a:lnTo>
+                    <a:pt x="2220298" y="1043670"/>
+                  </a:lnTo>
+                  <a:lnTo>
+                    <a:pt x="2148675" y="1019357"/>
+                  </a:lnTo>
+                  <a:lnTo>
+                    <a:pt x="2077053" y="994539"/>
+                  </a:lnTo>
+                  <a:lnTo>
+                    <a:pt x="2005430" y="969205"/>
+                  </a:lnTo>
+                  <a:lnTo>
+                    <a:pt x="1933808" y="943345"/>
+                  </a:lnTo>
+                  <a:lnTo>
+                    <a:pt x="1862185" y="916946"/>
+                  </a:lnTo>
+                  <a:lnTo>
+                    <a:pt x="1790563" y="889999"/>
+                  </a:lnTo>
+                  <a:lnTo>
+                    <a:pt x="1718940" y="862492"/>
+                  </a:lnTo>
+                  <a:lnTo>
+                    <a:pt x="1647318" y="834413"/>
+                  </a:lnTo>
+                  <a:lnTo>
+                    <a:pt x="1575695" y="805750"/>
+                  </a:lnTo>
+                  <a:lnTo>
+                    <a:pt x="1504073" y="776492"/>
+                  </a:lnTo>
+                  <a:lnTo>
+                    <a:pt x="1432450" y="746625"/>
+                  </a:lnTo>
+                  <a:lnTo>
+                    <a:pt x="1360827" y="716137"/>
+                  </a:lnTo>
+                  <a:lnTo>
+                    <a:pt x="1289205" y="685015"/>
+                  </a:lnTo>
+                  <a:lnTo>
+                    <a:pt x="1217582" y="653246"/>
+                  </a:lnTo>
+                  <a:lnTo>
+                    <a:pt x="1145960" y="620817"/>
+                  </a:lnTo>
+                  <a:lnTo>
+                    <a:pt x="1074337" y="587714"/>
+                  </a:lnTo>
+                  <a:lnTo>
+                    <a:pt x="1002715" y="553922"/>
+                  </a:lnTo>
+                  <a:lnTo>
+                    <a:pt x="931092" y="519428"/>
+                  </a:lnTo>
+                  <a:lnTo>
+                    <a:pt x="859470" y="484217"/>
+                  </a:lnTo>
+                  <a:lnTo>
+                    <a:pt x="787847" y="448274"/>
+                  </a:lnTo>
+                  <a:lnTo>
+                    <a:pt x="716225" y="411584"/>
+                  </a:lnTo>
+                  <a:lnTo>
+                    <a:pt x="644602" y="374130"/>
+                  </a:lnTo>
+                  <a:lnTo>
+                    <a:pt x="572980" y="335899"/>
+                  </a:lnTo>
+                  <a:lnTo>
+                    <a:pt x="501357" y="296872"/>
+                  </a:lnTo>
+                  <a:lnTo>
+                    <a:pt x="429735" y="257034"/>
+                  </a:lnTo>
+                  <a:lnTo>
+                    <a:pt x="358112" y="216368"/>
+                  </a:lnTo>
+                  <a:lnTo>
+                    <a:pt x="286490" y="174857"/>
+                  </a:lnTo>
+                  <a:lnTo>
+                    <a:pt x="214867" y="132482"/>
+                  </a:lnTo>
+                  <a:lnTo>
+                    <a:pt x="143245" y="89227"/>
+                  </a:lnTo>
+                  <a:lnTo>
+                    <a:pt x="71622" y="45072"/>
                   </a:lnTo>
                   <a:lnTo>
                     <a:pt x="0" y="0"/>
@@ -4114,285 +4114,285 @@
           </p:nvSpPr>
           <p:spPr>
             <a:xfrm>
-              <a:off x="1837061" y="2073503"/>
-              <a:ext cx="6425617" cy="3361727"/>
+              <a:off x="1848111" y="2073503"/>
+              <a:ext cx="6414568" cy="3362661"/>
             </a:xfrm>
             <a:custGeom>
               <a:avLst/>
               <a:pathLst>
-                <a:path w="6425617" h="3361727">
+                <a:path w="6414568" h="3362661">
                   <a:moveTo>
                     <a:pt x="0" y="0"/>
                   </a:moveTo>
                   <a:lnTo>
-                    <a:pt x="51212" y="92305"/>
-                  </a:lnTo>
-                  <a:lnTo>
-                    <a:pt x="122835" y="216664"/>
-                  </a:lnTo>
-                  <a:lnTo>
-                    <a:pt x="194457" y="336463"/>
-                  </a:lnTo>
-                  <a:lnTo>
-                    <a:pt x="266080" y="451869"/>
-                  </a:lnTo>
-                  <a:lnTo>
-                    <a:pt x="337702" y="563043"/>
-                  </a:lnTo>
-                  <a:lnTo>
-                    <a:pt x="409325" y="670141"/>
-                  </a:lnTo>
-                  <a:lnTo>
-                    <a:pt x="480947" y="773312"/>
-                  </a:lnTo>
-                  <a:lnTo>
-                    <a:pt x="552570" y="872699"/>
-                  </a:lnTo>
-                  <a:lnTo>
-                    <a:pt x="624192" y="968442"/>
-                  </a:lnTo>
-                  <a:lnTo>
-                    <a:pt x="695815" y="1060675"/>
-                  </a:lnTo>
-                  <a:lnTo>
-                    <a:pt x="767437" y="1149525"/>
-                  </a:lnTo>
-                  <a:lnTo>
-                    <a:pt x="839060" y="1235117"/>
-                  </a:lnTo>
-                  <a:lnTo>
-                    <a:pt x="910682" y="1317571"/>
-                  </a:lnTo>
-                  <a:lnTo>
-                    <a:pt x="982305" y="1397001"/>
-                  </a:lnTo>
-                  <a:lnTo>
-                    <a:pt x="1053928" y="1473519"/>
-                  </a:lnTo>
-                  <a:lnTo>
-                    <a:pt x="1125550" y="1547231"/>
-                  </a:lnTo>
-                  <a:lnTo>
-                    <a:pt x="1197173" y="1618240"/>
-                  </a:lnTo>
-                  <a:lnTo>
-                    <a:pt x="1268795" y="1686645"/>
-                  </a:lnTo>
-                  <a:lnTo>
-                    <a:pt x="1340418" y="1752542"/>
-                  </a:lnTo>
-                  <a:lnTo>
-                    <a:pt x="1412040" y="1816023"/>
-                  </a:lnTo>
-                  <a:lnTo>
-                    <a:pt x="1483663" y="1877176"/>
-                  </a:lnTo>
-                  <a:lnTo>
-                    <a:pt x="1555285" y="1936086"/>
-                  </a:lnTo>
-                  <a:lnTo>
-                    <a:pt x="1626908" y="1992837"/>
-                  </a:lnTo>
-                  <a:lnTo>
-                    <a:pt x="1698530" y="2047506"/>
-                  </a:lnTo>
-                  <a:lnTo>
-                    <a:pt x="1770153" y="2100171"/>
-                  </a:lnTo>
-                  <a:lnTo>
-                    <a:pt x="1841775" y="2150904"/>
-                  </a:lnTo>
-                  <a:lnTo>
-                    <a:pt x="1913398" y="2199777"/>
-                  </a:lnTo>
-                  <a:lnTo>
-                    <a:pt x="1985020" y="2246859"/>
-                  </a:lnTo>
-                  <a:lnTo>
-                    <a:pt x="2056643" y="2292213"/>
-                  </a:lnTo>
-                  <a:lnTo>
-                    <a:pt x="2128265" y="2335905"/>
-                  </a:lnTo>
-                  <a:lnTo>
-                    <a:pt x="2199888" y="2377995"/>
-                  </a:lnTo>
-                  <a:lnTo>
-                    <a:pt x="2271510" y="2418541"/>
-                  </a:lnTo>
-                  <a:lnTo>
-                    <a:pt x="2343133" y="2457600"/>
-                  </a:lnTo>
-                  <a:lnTo>
-                    <a:pt x="2414756" y="2495228"/>
-                  </a:lnTo>
-                  <a:lnTo>
-                    <a:pt x="2486378" y="2531475"/>
-                  </a:lnTo>
-                  <a:lnTo>
-                    <a:pt x="2558001" y="2566393"/>
-                  </a:lnTo>
-                  <a:lnTo>
-                    <a:pt x="2629623" y="2600031"/>
-                  </a:lnTo>
-                  <a:lnTo>
-                    <a:pt x="2701246" y="2632436"/>
-                  </a:lnTo>
-                  <a:lnTo>
-                    <a:pt x="2772868" y="2663652"/>
-                  </a:lnTo>
-                  <a:lnTo>
-                    <a:pt x="2844491" y="2693724"/>
-                  </a:lnTo>
-                  <a:lnTo>
-                    <a:pt x="2916113" y="2722693"/>
-                  </a:lnTo>
-                  <a:lnTo>
-                    <a:pt x="2987736" y="2750599"/>
-                  </a:lnTo>
-                  <a:lnTo>
-                    <a:pt x="3059358" y="2777483"/>
-                  </a:lnTo>
-                  <a:lnTo>
-                    <a:pt x="3130981" y="2803380"/>
-                  </a:lnTo>
-                  <a:lnTo>
-                    <a:pt x="3202603" y="2828328"/>
-                  </a:lnTo>
-                  <a:lnTo>
-                    <a:pt x="3274226" y="2852361"/>
-                  </a:lnTo>
-                  <a:lnTo>
-                    <a:pt x="3345848" y="2875513"/>
-                  </a:lnTo>
-                  <a:lnTo>
-                    <a:pt x="3417471" y="2897816"/>
-                  </a:lnTo>
-                  <a:lnTo>
-                    <a:pt x="3489093" y="2919301"/>
-                  </a:lnTo>
-                  <a:lnTo>
-                    <a:pt x="3560716" y="2939999"/>
-                  </a:lnTo>
-                  <a:lnTo>
-                    <a:pt x="3632338" y="2959937"/>
-                  </a:lnTo>
-                  <a:lnTo>
-                    <a:pt x="3703961" y="2979144"/>
-                  </a:lnTo>
-                  <a:lnTo>
-                    <a:pt x="3775584" y="2997647"/>
-                  </a:lnTo>
-                  <a:lnTo>
-                    <a:pt x="3847206" y="3015472"/>
-                  </a:lnTo>
-                  <a:lnTo>
-                    <a:pt x="3918829" y="3032643"/>
-                  </a:lnTo>
-                  <a:lnTo>
-                    <a:pt x="3990451" y="3049184"/>
-                  </a:lnTo>
-                  <a:lnTo>
-                    <a:pt x="4062074" y="3065119"/>
-                  </a:lnTo>
-                  <a:lnTo>
-                    <a:pt x="4133696" y="3080469"/>
-                  </a:lnTo>
-                  <a:lnTo>
-                    <a:pt x="4205319" y="3095257"/>
-                  </a:lnTo>
-                  <a:lnTo>
-                    <a:pt x="4276941" y="3109502"/>
-                  </a:lnTo>
-                  <a:lnTo>
-                    <a:pt x="4348564" y="3123225"/>
-                  </a:lnTo>
-                  <a:lnTo>
-                    <a:pt x="4420186" y="3136445"/>
-                  </a:lnTo>
-                  <a:lnTo>
-                    <a:pt x="4491809" y="3149180"/>
-                  </a:lnTo>
-                  <a:lnTo>
-                    <a:pt x="4563431" y="3161448"/>
-                  </a:lnTo>
-                  <a:lnTo>
-                    <a:pt x="4635054" y="3173266"/>
-                  </a:lnTo>
-                  <a:lnTo>
-                    <a:pt x="4706676" y="3184651"/>
-                  </a:lnTo>
-                  <a:lnTo>
-                    <a:pt x="4778299" y="3195618"/>
-                  </a:lnTo>
-                  <a:lnTo>
-                    <a:pt x="4849921" y="3206184"/>
-                  </a:lnTo>
-                  <a:lnTo>
-                    <a:pt x="4921544" y="3216361"/>
-                  </a:lnTo>
-                  <a:lnTo>
-                    <a:pt x="4993166" y="3226166"/>
-                  </a:lnTo>
-                  <a:lnTo>
-                    <a:pt x="5064789" y="3235611"/>
-                  </a:lnTo>
-                  <a:lnTo>
-                    <a:pt x="5136412" y="3244710"/>
-                  </a:lnTo>
-                  <a:lnTo>
-                    <a:pt x="5208034" y="3253475"/>
-                  </a:lnTo>
-                  <a:lnTo>
-                    <a:pt x="5279657" y="3261919"/>
-                  </a:lnTo>
-                  <a:lnTo>
-                    <a:pt x="5351279" y="3270053"/>
-                  </a:lnTo>
-                  <a:lnTo>
-                    <a:pt x="5422902" y="3277888"/>
-                  </a:lnTo>
-                  <a:lnTo>
-                    <a:pt x="5494524" y="3285437"/>
-                  </a:lnTo>
-                  <a:lnTo>
-                    <a:pt x="5566147" y="3292709"/>
-                  </a:lnTo>
-                  <a:lnTo>
-                    <a:pt x="5637769" y="3299714"/>
-                  </a:lnTo>
-                  <a:lnTo>
-                    <a:pt x="5709392" y="3306462"/>
-                  </a:lnTo>
-                  <a:lnTo>
-                    <a:pt x="5781014" y="3312963"/>
-                  </a:lnTo>
-                  <a:lnTo>
-                    <a:pt x="5852637" y="3319225"/>
-                  </a:lnTo>
-                  <a:lnTo>
-                    <a:pt x="5924259" y="3325258"/>
-                  </a:lnTo>
-                  <a:lnTo>
-                    <a:pt x="5995882" y="3331069"/>
-                  </a:lnTo>
-                  <a:lnTo>
-                    <a:pt x="6067504" y="3336668"/>
-                  </a:lnTo>
-                  <a:lnTo>
-                    <a:pt x="6139127" y="3342061"/>
-                  </a:lnTo>
-                  <a:lnTo>
-                    <a:pt x="6210749" y="3347256"/>
-                  </a:lnTo>
-                  <a:lnTo>
-                    <a:pt x="6282372" y="3352261"/>
-                  </a:lnTo>
-                  <a:lnTo>
-                    <a:pt x="6353994" y="3357083"/>
-                  </a:lnTo>
-                  <a:lnTo>
-                    <a:pt x="6425617" y="3361727"/>
+                    <a:pt x="40163" y="73097"/>
+                  </a:lnTo>
+                  <a:lnTo>
+                    <a:pt x="111785" y="198653"/>
+                  </a:lnTo>
+                  <a:lnTo>
+                    <a:pt x="183408" y="319586"/>
+                  </a:lnTo>
+                  <a:lnTo>
+                    <a:pt x="255030" y="436068"/>
+                  </a:lnTo>
+                  <a:lnTo>
+                    <a:pt x="326653" y="548261"/>
+                  </a:lnTo>
+                  <a:lnTo>
+                    <a:pt x="398275" y="656325"/>
+                  </a:lnTo>
+                  <a:lnTo>
+                    <a:pt x="469898" y="760410"/>
+                  </a:lnTo>
+                  <a:lnTo>
+                    <a:pt x="541520" y="860663"/>
+                  </a:lnTo>
+                  <a:lnTo>
+                    <a:pt x="613143" y="957226"/>
+                  </a:lnTo>
+                  <a:lnTo>
+                    <a:pt x="684765" y="1050235"/>
+                  </a:lnTo>
+                  <a:lnTo>
+                    <a:pt x="756388" y="1139819"/>
+                  </a:lnTo>
+                  <a:lnTo>
+                    <a:pt x="828011" y="1226106"/>
+                  </a:lnTo>
+                  <a:lnTo>
+                    <a:pt x="899633" y="1309216"/>
+                  </a:lnTo>
+                  <a:lnTo>
+                    <a:pt x="971256" y="1389266"/>
+                  </a:lnTo>
+                  <a:lnTo>
+                    <a:pt x="1042878" y="1466370"/>
+                  </a:lnTo>
+                  <a:lnTo>
+                    <a:pt x="1114501" y="1540635"/>
+                  </a:lnTo>
+                  <a:lnTo>
+                    <a:pt x="1186123" y="1612166"/>
+                  </a:lnTo>
+                  <a:lnTo>
+                    <a:pt x="1257746" y="1681064"/>
+                  </a:lnTo>
+                  <a:lnTo>
+                    <a:pt x="1329368" y="1747426"/>
+                  </a:lnTo>
+                  <a:lnTo>
+                    <a:pt x="1400991" y="1811345"/>
+                  </a:lnTo>
+                  <a:lnTo>
+                    <a:pt x="1472613" y="1872911"/>
+                  </a:lnTo>
+                  <a:lnTo>
+                    <a:pt x="1544236" y="1932210"/>
+                  </a:lnTo>
+                  <a:lnTo>
+                    <a:pt x="1615858" y="1989326"/>
+                  </a:lnTo>
+                  <a:lnTo>
+                    <a:pt x="1687481" y="2044340"/>
+                  </a:lnTo>
+                  <a:lnTo>
+                    <a:pt x="1759103" y="2097329"/>
+                  </a:lnTo>
+                  <a:lnTo>
+                    <a:pt x="1830726" y="2148367"/>
+                  </a:lnTo>
+                  <a:lnTo>
+                    <a:pt x="1902348" y="2197526"/>
+                  </a:lnTo>
+                  <a:lnTo>
+                    <a:pt x="1973971" y="2244875"/>
+                  </a:lnTo>
+                  <a:lnTo>
+                    <a:pt x="2045593" y="2290481"/>
+                  </a:lnTo>
+                  <a:lnTo>
+                    <a:pt x="2117216" y="2334409"/>
+                  </a:lnTo>
+                  <a:lnTo>
+                    <a:pt x="2188839" y="2376719"/>
+                  </a:lnTo>
+                  <a:lnTo>
+                    <a:pt x="2260461" y="2417472"/>
+                  </a:lnTo>
+                  <a:lnTo>
+                    <a:pt x="2332084" y="2456724"/>
+                  </a:lnTo>
+                  <a:lnTo>
+                    <a:pt x="2403706" y="2494532"/>
+                  </a:lnTo>
+                  <a:lnTo>
+                    <a:pt x="2475329" y="2530948"/>
+                  </a:lnTo>
+                  <a:lnTo>
+                    <a:pt x="2546951" y="2566023"/>
+                  </a:lnTo>
+                  <a:lnTo>
+                    <a:pt x="2618574" y="2599807"/>
+                  </a:lnTo>
+                  <a:lnTo>
+                    <a:pt x="2690196" y="2632347"/>
+                  </a:lnTo>
+                  <a:lnTo>
+                    <a:pt x="2761819" y="2663689"/>
+                  </a:lnTo>
+                  <a:lnTo>
+                    <a:pt x="2833441" y="2693878"/>
+                  </a:lnTo>
+                  <a:lnTo>
+                    <a:pt x="2905064" y="2722955"/>
+                  </a:lnTo>
+                  <a:lnTo>
+                    <a:pt x="2976686" y="2750962"/>
+                  </a:lnTo>
+                  <a:lnTo>
+                    <a:pt x="3048309" y="2777938"/>
+                  </a:lnTo>
+                  <a:lnTo>
+                    <a:pt x="3119931" y="2803921"/>
+                  </a:lnTo>
+                  <a:lnTo>
+                    <a:pt x="3191554" y="2828947"/>
+                  </a:lnTo>
+                  <a:lnTo>
+                    <a:pt x="3263176" y="2853052"/>
+                  </a:lnTo>
+                  <a:lnTo>
+                    <a:pt x="3334799" y="2876270"/>
+                  </a:lnTo>
+                  <a:lnTo>
+                    <a:pt x="3406421" y="2898632"/>
+                  </a:lnTo>
+                  <a:lnTo>
+                    <a:pt x="3478044" y="2920172"/>
+                  </a:lnTo>
+                  <a:lnTo>
+                    <a:pt x="3549667" y="2940919"/>
+                  </a:lnTo>
+                  <a:lnTo>
+                    <a:pt x="3621289" y="2960902"/>
+                  </a:lnTo>
+                  <a:lnTo>
+                    <a:pt x="3692912" y="2980149"/>
+                  </a:lnTo>
+                  <a:lnTo>
+                    <a:pt x="3764534" y="2998688"/>
+                  </a:lnTo>
+                  <a:lnTo>
+                    <a:pt x="3836157" y="3016544"/>
+                  </a:lnTo>
+                  <a:lnTo>
+                    <a:pt x="3907779" y="3033743"/>
+                  </a:lnTo>
+                  <a:lnTo>
+                    <a:pt x="3979402" y="3050309"/>
+                  </a:lnTo>
+                  <a:lnTo>
+                    <a:pt x="4051024" y="3066265"/>
+                  </a:lnTo>
+                  <a:lnTo>
+                    <a:pt x="4122647" y="3081634"/>
+                  </a:lnTo>
+                  <a:lnTo>
+                    <a:pt x="4194269" y="3096437"/>
+                  </a:lnTo>
+                  <a:lnTo>
+                    <a:pt x="4265892" y="3110695"/>
+                  </a:lnTo>
+                  <a:lnTo>
+                    <a:pt x="4337514" y="3124428"/>
+                  </a:lnTo>
+                  <a:lnTo>
+                    <a:pt x="4409137" y="3137655"/>
+                  </a:lnTo>
+                  <a:lnTo>
+                    <a:pt x="4480759" y="3150396"/>
+                  </a:lnTo>
+                  <a:lnTo>
+                    <a:pt x="4552382" y="3162667"/>
+                  </a:lnTo>
+                  <a:lnTo>
+                    <a:pt x="4624004" y="3174487"/>
+                  </a:lnTo>
+                  <a:lnTo>
+                    <a:pt x="4695627" y="3185872"/>
+                  </a:lnTo>
+                  <a:lnTo>
+                    <a:pt x="4767249" y="3196838"/>
+                  </a:lnTo>
+                  <a:lnTo>
+                    <a:pt x="4838872" y="3207399"/>
+                  </a:lnTo>
+                  <a:lnTo>
+                    <a:pt x="4910495" y="3217573"/>
+                  </a:lnTo>
+                  <a:lnTo>
+                    <a:pt x="4982117" y="3227371"/>
+                  </a:lnTo>
+                  <a:lnTo>
+                    <a:pt x="5053740" y="3236809"/>
+                  </a:lnTo>
+                  <a:lnTo>
+                    <a:pt x="5125362" y="3245899"/>
+                  </a:lnTo>
+                  <a:lnTo>
+                    <a:pt x="5196985" y="3254655"/>
+                  </a:lnTo>
+                  <a:lnTo>
+                    <a:pt x="5268607" y="3263089"/>
+                  </a:lnTo>
+                  <a:lnTo>
+                    <a:pt x="5340230" y="3271212"/>
+                  </a:lnTo>
+                  <a:lnTo>
+                    <a:pt x="5411852" y="3279036"/>
+                  </a:lnTo>
+                  <a:lnTo>
+                    <a:pt x="5483475" y="3286572"/>
+                  </a:lnTo>
+                  <a:lnTo>
+                    <a:pt x="5555097" y="3293830"/>
+                  </a:lnTo>
+                  <a:lnTo>
+                    <a:pt x="5626720" y="3300822"/>
+                  </a:lnTo>
+                  <a:lnTo>
+                    <a:pt x="5698342" y="3307556"/>
+                  </a:lnTo>
+                  <a:lnTo>
+                    <a:pt x="5769965" y="3314042"/>
+                  </a:lnTo>
+                  <a:lnTo>
+                    <a:pt x="5841587" y="3320289"/>
+                  </a:lnTo>
+                  <a:lnTo>
+                    <a:pt x="5913210" y="3326306"/>
+                  </a:lnTo>
+                  <a:lnTo>
+                    <a:pt x="5984832" y="3332102"/>
+                  </a:lnTo>
+                  <a:lnTo>
+                    <a:pt x="6056455" y="3337685"/>
+                  </a:lnTo>
+                  <a:lnTo>
+                    <a:pt x="6128077" y="3343062"/>
+                  </a:lnTo>
+                  <a:lnTo>
+                    <a:pt x="6199700" y="3348241"/>
+                  </a:lnTo>
+                  <a:lnTo>
+                    <a:pt x="6271323" y="3353229"/>
+                  </a:lnTo>
+                  <a:lnTo>
+                    <a:pt x="6342945" y="3358034"/>
+                  </a:lnTo>
+                  <a:lnTo>
+                    <a:pt x="6414568" y="3362661"/>
                   </a:lnTo>
                 </a:path>
               </a:pathLst>
@@ -5000,7 +5000,7 @@
                   <a:latin typeface="Helvetica"/>
                   <a:cs typeface="Helvetica"/>
                 </a:rPr>
-                <a:t>subHR per 10 % decline: 1.57 (1.28-1.92), p_Bonf = &lt;0.001 (n = 6)  |  per IQR decline (Δ = 29.3 %): 3.72 (2.05-6.75)  |  IQR: [-14.6, 14.7] %</a:t>
+                <a:t>subHR per 10 % decline: 1.57 (1.28-1.92), p_Bonf = &lt;0.001 (n = 6)  |  per IQR decline (Δ = 29.3 %): 3.74 (2.06-6.79)  |  IQR: [-14.6, 14.7] %</a:t>
               </a:r>
             </a:p>
           </p:txBody>
